--- a/docs/pptx/entire/ritu-entire-linsubhr-sens-anemia2_10pct.pptx
+++ b/docs/pptx/entire/ritu-entire-linsubhr-sens-anemia2_10pct.pptx
@@ -3389,612 +3389,612 @@
           </p:nvSpPr>
           <p:spPr>
             <a:xfrm>
-              <a:off x="1172049" y="4184672"/>
-              <a:ext cx="7090630" cy="949599"/>
+              <a:off x="1172049" y="4194034"/>
+              <a:ext cx="7090630" cy="936348"/>
             </a:xfrm>
             <a:custGeom>
               <a:avLst/>
               <a:pathLst>
-                <a:path w="7090630" h="949599">
+                <a:path w="7090630" h="936348">
                   <a:moveTo>
                     <a:pt x="0" y="0"/>
                   </a:moveTo>
                   <a:lnTo>
-                    <a:pt x="71622" y="16223"/>
-                  </a:lnTo>
-                  <a:lnTo>
-                    <a:pt x="143245" y="32255"/>
-                  </a:lnTo>
-                  <a:lnTo>
-                    <a:pt x="214867" y="48097"/>
-                  </a:lnTo>
-                  <a:lnTo>
-                    <a:pt x="286490" y="63752"/>
-                  </a:lnTo>
-                  <a:lnTo>
-                    <a:pt x="358112" y="79222"/>
-                  </a:lnTo>
-                  <a:lnTo>
-                    <a:pt x="429735" y="94509"/>
-                  </a:lnTo>
-                  <a:lnTo>
-                    <a:pt x="501357" y="109616"/>
-                  </a:lnTo>
-                  <a:lnTo>
-                    <a:pt x="572980" y="124543"/>
-                  </a:lnTo>
-                  <a:lnTo>
-                    <a:pt x="644602" y="139295"/>
-                  </a:lnTo>
-                  <a:lnTo>
-                    <a:pt x="716225" y="153872"/>
-                  </a:lnTo>
-                  <a:lnTo>
-                    <a:pt x="787847" y="168277"/>
-                  </a:lnTo>
-                  <a:lnTo>
-                    <a:pt x="859470" y="182511"/>
-                  </a:lnTo>
-                  <a:lnTo>
-                    <a:pt x="931092" y="196577"/>
-                  </a:lnTo>
-                  <a:lnTo>
-                    <a:pt x="1002715" y="210478"/>
-                  </a:lnTo>
-                  <a:lnTo>
-                    <a:pt x="1074337" y="224213"/>
-                  </a:lnTo>
-                  <a:lnTo>
-                    <a:pt x="1145960" y="237787"/>
-                  </a:lnTo>
-                  <a:lnTo>
-                    <a:pt x="1217582" y="251200"/>
-                  </a:lnTo>
-                  <a:lnTo>
-                    <a:pt x="1289205" y="264454"/>
-                  </a:lnTo>
-                  <a:lnTo>
-                    <a:pt x="1360827" y="277552"/>
-                  </a:lnTo>
-                  <a:lnTo>
-                    <a:pt x="1432450" y="290495"/>
-                  </a:lnTo>
-                  <a:lnTo>
-                    <a:pt x="1504073" y="303284"/>
-                  </a:lnTo>
-                  <a:lnTo>
-                    <a:pt x="1575695" y="315923"/>
-                  </a:lnTo>
-                  <a:lnTo>
-                    <a:pt x="1647318" y="328413"/>
-                  </a:lnTo>
-                  <a:lnTo>
-                    <a:pt x="1718940" y="340754"/>
-                  </a:lnTo>
-                  <a:lnTo>
-                    <a:pt x="1790563" y="352950"/>
-                  </a:lnTo>
-                  <a:lnTo>
-                    <a:pt x="1862185" y="365002"/>
-                  </a:lnTo>
-                  <a:lnTo>
-                    <a:pt x="1933808" y="376911"/>
-                  </a:lnTo>
-                  <a:lnTo>
-                    <a:pt x="2005430" y="388680"/>
-                  </a:lnTo>
-                  <a:lnTo>
-                    <a:pt x="2077053" y="400309"/>
-                  </a:lnTo>
-                  <a:lnTo>
-                    <a:pt x="2148675" y="411801"/>
-                  </a:lnTo>
-                  <a:lnTo>
-                    <a:pt x="2220298" y="423157"/>
-                  </a:lnTo>
-                  <a:lnTo>
-                    <a:pt x="2291920" y="434379"/>
-                  </a:lnTo>
-                  <a:lnTo>
-                    <a:pt x="2363543" y="445468"/>
-                  </a:lnTo>
-                  <a:lnTo>
-                    <a:pt x="2435165" y="456427"/>
-                  </a:lnTo>
-                  <a:lnTo>
-                    <a:pt x="2506788" y="467255"/>
-                  </a:lnTo>
-                  <a:lnTo>
-                    <a:pt x="2578410" y="477956"/>
-                  </a:lnTo>
-                  <a:lnTo>
-                    <a:pt x="2650033" y="488530"/>
-                  </a:lnTo>
-                  <a:lnTo>
-                    <a:pt x="2721655" y="498979"/>
-                  </a:lnTo>
-                  <a:lnTo>
-                    <a:pt x="2793278" y="509305"/>
-                  </a:lnTo>
-                  <a:lnTo>
-                    <a:pt x="2864901" y="519509"/>
-                  </a:lnTo>
-                  <a:lnTo>
-                    <a:pt x="2936523" y="529592"/>
-                  </a:lnTo>
-                  <a:lnTo>
-                    <a:pt x="3008146" y="539556"/>
-                  </a:lnTo>
-                  <a:lnTo>
-                    <a:pt x="3079768" y="544536"/>
-                  </a:lnTo>
-                  <a:lnTo>
-                    <a:pt x="3151391" y="546753"/>
-                  </a:lnTo>
-                  <a:lnTo>
-                    <a:pt x="3223013" y="548965"/>
-                  </a:lnTo>
-                  <a:lnTo>
-                    <a:pt x="3294636" y="551171"/>
-                  </a:lnTo>
-                  <a:lnTo>
-                    <a:pt x="3366258" y="553371"/>
-                  </a:lnTo>
-                  <a:lnTo>
-                    <a:pt x="3437881" y="555565"/>
-                  </a:lnTo>
-                  <a:lnTo>
-                    <a:pt x="3509503" y="557753"/>
-                  </a:lnTo>
-                  <a:lnTo>
-                    <a:pt x="3581126" y="559935"/>
-                  </a:lnTo>
-                  <a:lnTo>
-                    <a:pt x="3652748" y="562112"/>
-                  </a:lnTo>
-                  <a:lnTo>
-                    <a:pt x="3724371" y="564282"/>
-                  </a:lnTo>
-                  <a:lnTo>
-                    <a:pt x="3795993" y="566447"/>
-                  </a:lnTo>
-                  <a:lnTo>
-                    <a:pt x="3867616" y="568606"/>
-                  </a:lnTo>
-                  <a:lnTo>
-                    <a:pt x="3939238" y="570759"/>
-                  </a:lnTo>
-                  <a:lnTo>
-                    <a:pt x="4010861" y="572907"/>
-                  </a:lnTo>
-                  <a:lnTo>
-                    <a:pt x="4082483" y="575049"/>
-                  </a:lnTo>
-                  <a:lnTo>
-                    <a:pt x="4154106" y="577184"/>
-                  </a:lnTo>
-                  <a:lnTo>
-                    <a:pt x="4225729" y="579315"/>
-                  </a:lnTo>
-                  <a:lnTo>
-                    <a:pt x="4297351" y="581439"/>
-                  </a:lnTo>
-                  <a:lnTo>
-                    <a:pt x="4368974" y="583558"/>
-                  </a:lnTo>
-                  <a:lnTo>
-                    <a:pt x="4440596" y="585671"/>
-                  </a:lnTo>
-                  <a:lnTo>
-                    <a:pt x="4512219" y="587779"/>
-                  </a:lnTo>
-                  <a:lnTo>
-                    <a:pt x="4583841" y="589881"/>
-                  </a:lnTo>
-                  <a:lnTo>
-                    <a:pt x="4655464" y="591977"/>
-                  </a:lnTo>
-                  <a:lnTo>
-                    <a:pt x="4727086" y="594068"/>
-                  </a:lnTo>
-                  <a:lnTo>
-                    <a:pt x="4798709" y="596153"/>
-                  </a:lnTo>
-                  <a:lnTo>
-                    <a:pt x="4870331" y="598232"/>
-                  </a:lnTo>
-                  <a:lnTo>
-                    <a:pt x="4941954" y="600306"/>
-                  </a:lnTo>
-                  <a:lnTo>
-                    <a:pt x="5013576" y="602374"/>
-                  </a:lnTo>
-                  <a:lnTo>
-                    <a:pt x="5085199" y="604437"/>
-                  </a:lnTo>
-                  <a:lnTo>
-                    <a:pt x="5156821" y="606494"/>
-                  </a:lnTo>
-                  <a:lnTo>
-                    <a:pt x="5228444" y="608546"/>
-                  </a:lnTo>
-                  <a:lnTo>
-                    <a:pt x="5300066" y="610592"/>
-                  </a:lnTo>
-                  <a:lnTo>
-                    <a:pt x="5371689" y="612633"/>
-                  </a:lnTo>
-                  <a:lnTo>
-                    <a:pt x="5443311" y="614668"/>
-                  </a:lnTo>
-                  <a:lnTo>
-                    <a:pt x="5514934" y="616698"/>
-                  </a:lnTo>
-                  <a:lnTo>
-                    <a:pt x="5586557" y="618723"/>
-                  </a:lnTo>
-                  <a:lnTo>
-                    <a:pt x="5658179" y="620742"/>
-                  </a:lnTo>
-                  <a:lnTo>
-                    <a:pt x="5729802" y="622755"/>
-                  </a:lnTo>
-                  <a:lnTo>
-                    <a:pt x="5801424" y="624763"/>
-                  </a:lnTo>
-                  <a:lnTo>
-                    <a:pt x="5873047" y="626766"/>
-                  </a:lnTo>
-                  <a:lnTo>
-                    <a:pt x="5944669" y="628764"/>
-                  </a:lnTo>
-                  <a:lnTo>
-                    <a:pt x="6016292" y="630756"/>
-                  </a:lnTo>
-                  <a:lnTo>
-                    <a:pt x="6087914" y="632743"/>
-                  </a:lnTo>
-                  <a:lnTo>
-                    <a:pt x="6159537" y="634724"/>
-                  </a:lnTo>
-                  <a:lnTo>
-                    <a:pt x="6231159" y="636700"/>
-                  </a:lnTo>
-                  <a:lnTo>
-                    <a:pt x="6302782" y="638671"/>
-                  </a:lnTo>
-                  <a:lnTo>
-                    <a:pt x="6374404" y="640637"/>
-                  </a:lnTo>
-                  <a:lnTo>
-                    <a:pt x="6446027" y="642597"/>
-                  </a:lnTo>
-                  <a:lnTo>
-                    <a:pt x="6517649" y="644552"/>
-                  </a:lnTo>
-                  <a:lnTo>
-                    <a:pt x="6589272" y="646502"/>
-                  </a:lnTo>
-                  <a:lnTo>
-                    <a:pt x="6660894" y="648446"/>
-                  </a:lnTo>
-                  <a:lnTo>
-                    <a:pt x="6732517" y="650386"/>
-                  </a:lnTo>
-                  <a:lnTo>
-                    <a:pt x="6804139" y="652320"/>
-                  </a:lnTo>
-                  <a:lnTo>
-                    <a:pt x="6875762" y="654249"/>
-                  </a:lnTo>
-                  <a:lnTo>
-                    <a:pt x="6947385" y="656173"/>
-                  </a:lnTo>
-                  <a:lnTo>
-                    <a:pt x="7019007" y="658092"/>
-                  </a:lnTo>
-                  <a:lnTo>
-                    <a:pt x="7090630" y="660005"/>
-                  </a:lnTo>
-                  <a:lnTo>
-                    <a:pt x="7090630" y="949599"/>
-                  </a:lnTo>
-                  <a:lnTo>
-                    <a:pt x="7019007" y="944539"/>
-                  </a:lnTo>
-                  <a:lnTo>
-                    <a:pt x="6947385" y="939419"/>
-                  </a:lnTo>
-                  <a:lnTo>
-                    <a:pt x="6875762" y="934238"/>
-                  </a:lnTo>
-                  <a:lnTo>
-                    <a:pt x="6804139" y="928995"/>
-                  </a:lnTo>
-                  <a:lnTo>
-                    <a:pt x="6732517" y="923690"/>
-                  </a:lnTo>
-                  <a:lnTo>
-                    <a:pt x="6660894" y="918320"/>
-                  </a:lnTo>
-                  <a:lnTo>
-                    <a:pt x="6589272" y="912887"/>
-                  </a:lnTo>
-                  <a:lnTo>
-                    <a:pt x="6517649" y="907389"/>
-                  </a:lnTo>
-                  <a:lnTo>
-                    <a:pt x="6446027" y="901824"/>
-                  </a:lnTo>
-                  <a:lnTo>
-                    <a:pt x="6374404" y="896194"/>
-                  </a:lnTo>
-                  <a:lnTo>
-                    <a:pt x="6302782" y="890496"/>
-                  </a:lnTo>
-                  <a:lnTo>
-                    <a:pt x="6231159" y="884729"/>
-                  </a:lnTo>
-                  <a:lnTo>
-                    <a:pt x="6159537" y="878894"/>
-                  </a:lnTo>
-                  <a:lnTo>
-                    <a:pt x="6087914" y="872989"/>
-                  </a:lnTo>
-                  <a:lnTo>
-                    <a:pt x="6016292" y="867014"/>
-                  </a:lnTo>
-                  <a:lnTo>
-                    <a:pt x="5944669" y="860967"/>
-                  </a:lnTo>
-                  <a:lnTo>
-                    <a:pt x="5873047" y="854847"/>
-                  </a:lnTo>
-                  <a:lnTo>
-                    <a:pt x="5801424" y="848654"/>
-                  </a:lnTo>
-                  <a:lnTo>
-                    <a:pt x="5729802" y="842388"/>
-                  </a:lnTo>
-                  <a:lnTo>
-                    <a:pt x="5658179" y="836046"/>
-                  </a:lnTo>
-                  <a:lnTo>
-                    <a:pt x="5586557" y="829629"/>
-                  </a:lnTo>
-                  <a:lnTo>
-                    <a:pt x="5514934" y="823134"/>
-                  </a:lnTo>
-                  <a:lnTo>
-                    <a:pt x="5443311" y="816562"/>
-                  </a:lnTo>
-                  <a:lnTo>
-                    <a:pt x="5371689" y="809912"/>
-                  </a:lnTo>
-                  <a:lnTo>
-                    <a:pt x="5300066" y="803182"/>
-                  </a:lnTo>
-                  <a:lnTo>
-                    <a:pt x="5228444" y="796371"/>
-                  </a:lnTo>
-                  <a:lnTo>
-                    <a:pt x="5156821" y="789479"/>
-                  </a:lnTo>
-                  <a:lnTo>
-                    <a:pt x="5085199" y="782505"/>
-                  </a:lnTo>
-                  <a:lnTo>
-                    <a:pt x="5013576" y="775447"/>
-                  </a:lnTo>
-                  <a:lnTo>
-                    <a:pt x="4941954" y="768304"/>
-                  </a:lnTo>
-                  <a:lnTo>
-                    <a:pt x="4870331" y="761077"/>
-                  </a:lnTo>
-                  <a:lnTo>
-                    <a:pt x="4798709" y="753762"/>
-                  </a:lnTo>
-                  <a:lnTo>
-                    <a:pt x="4727086" y="746361"/>
-                  </a:lnTo>
-                  <a:lnTo>
-                    <a:pt x="4655464" y="738870"/>
-                  </a:lnTo>
-                  <a:lnTo>
-                    <a:pt x="4583841" y="731291"/>
-                  </a:lnTo>
-                  <a:lnTo>
-                    <a:pt x="4512219" y="723620"/>
-                  </a:lnTo>
-                  <a:lnTo>
-                    <a:pt x="4440596" y="715858"/>
-                  </a:lnTo>
-                  <a:lnTo>
-                    <a:pt x="4368974" y="708003"/>
-                  </a:lnTo>
-                  <a:lnTo>
-                    <a:pt x="4297351" y="700054"/>
-                  </a:lnTo>
-                  <a:lnTo>
-                    <a:pt x="4225729" y="692010"/>
-                  </a:lnTo>
-                  <a:lnTo>
-                    <a:pt x="4154106" y="683869"/>
-                  </a:lnTo>
-                  <a:lnTo>
-                    <a:pt x="4082483" y="675631"/>
-                  </a:lnTo>
-                  <a:lnTo>
-                    <a:pt x="4010861" y="667295"/>
-                  </a:lnTo>
-                  <a:lnTo>
-                    <a:pt x="3939238" y="658859"/>
-                  </a:lnTo>
-                  <a:lnTo>
-                    <a:pt x="3867616" y="650322"/>
-                  </a:lnTo>
-                  <a:lnTo>
-                    <a:pt x="3795993" y="641683"/>
-                  </a:lnTo>
-                  <a:lnTo>
-                    <a:pt x="3724371" y="632941"/>
-                  </a:lnTo>
-                  <a:lnTo>
-                    <a:pt x="3652748" y="624094"/>
-                  </a:lnTo>
-                  <a:lnTo>
-                    <a:pt x="3581126" y="615142"/>
-                  </a:lnTo>
-                  <a:lnTo>
-                    <a:pt x="3509503" y="606082"/>
-                  </a:lnTo>
-                  <a:lnTo>
-                    <a:pt x="3437881" y="596914"/>
-                  </a:lnTo>
-                  <a:lnTo>
-                    <a:pt x="3366258" y="587636"/>
-                  </a:lnTo>
-                  <a:lnTo>
-                    <a:pt x="3294636" y="578247"/>
-                  </a:lnTo>
-                  <a:lnTo>
-                    <a:pt x="3223013" y="568746"/>
-                  </a:lnTo>
-                  <a:lnTo>
-                    <a:pt x="3151391" y="559131"/>
-                  </a:lnTo>
-                  <a:lnTo>
-                    <a:pt x="3079768" y="549402"/>
-                  </a:lnTo>
-                  <a:lnTo>
-                    <a:pt x="3008146" y="542312"/>
-                  </a:lnTo>
-                  <a:lnTo>
-                    <a:pt x="2936523" y="540082"/>
-                  </a:lnTo>
-                  <a:lnTo>
-                    <a:pt x="2864901" y="537847"/>
-                  </a:lnTo>
-                  <a:lnTo>
-                    <a:pt x="2793278" y="535605"/>
-                  </a:lnTo>
-                  <a:lnTo>
-                    <a:pt x="2721655" y="533358"/>
-                  </a:lnTo>
-                  <a:lnTo>
-                    <a:pt x="2650033" y="531104"/>
-                  </a:lnTo>
-                  <a:lnTo>
-                    <a:pt x="2578410" y="528844"/>
-                  </a:lnTo>
-                  <a:lnTo>
-                    <a:pt x="2506788" y="526578"/>
-                  </a:lnTo>
-                  <a:lnTo>
-                    <a:pt x="2435165" y="524306"/>
-                  </a:lnTo>
-                  <a:lnTo>
-                    <a:pt x="2363543" y="522029"/>
-                  </a:lnTo>
-                  <a:lnTo>
-                    <a:pt x="2291920" y="519744"/>
-                  </a:lnTo>
-                  <a:lnTo>
-                    <a:pt x="2220298" y="517454"/>
-                  </a:lnTo>
-                  <a:lnTo>
-                    <a:pt x="2148675" y="515158"/>
-                  </a:lnTo>
-                  <a:lnTo>
-                    <a:pt x="2077053" y="512855"/>
-                  </a:lnTo>
-                  <a:lnTo>
-                    <a:pt x="2005430" y="510547"/>
-                  </a:lnTo>
-                  <a:lnTo>
-                    <a:pt x="1933808" y="508232"/>
-                  </a:lnTo>
-                  <a:lnTo>
-                    <a:pt x="1862185" y="505911"/>
-                  </a:lnTo>
-                  <a:lnTo>
-                    <a:pt x="1790563" y="503583"/>
-                  </a:lnTo>
-                  <a:lnTo>
-                    <a:pt x="1718940" y="501250"/>
-                  </a:lnTo>
-                  <a:lnTo>
-                    <a:pt x="1647318" y="498910"/>
-                  </a:lnTo>
-                  <a:lnTo>
-                    <a:pt x="1575695" y="496563"/>
-                  </a:lnTo>
-                  <a:lnTo>
-                    <a:pt x="1504073" y="494211"/>
-                  </a:lnTo>
-                  <a:lnTo>
-                    <a:pt x="1432450" y="491852"/>
-                  </a:lnTo>
-                  <a:lnTo>
-                    <a:pt x="1360827" y="489487"/>
-                  </a:lnTo>
-                  <a:lnTo>
-                    <a:pt x="1289205" y="487116"/>
-                  </a:lnTo>
-                  <a:lnTo>
-                    <a:pt x="1217582" y="484738"/>
-                  </a:lnTo>
-                  <a:lnTo>
-                    <a:pt x="1145960" y="482354"/>
-                  </a:lnTo>
-                  <a:lnTo>
-                    <a:pt x="1074337" y="479963"/>
-                  </a:lnTo>
-                  <a:lnTo>
-                    <a:pt x="1002715" y="477566"/>
-                  </a:lnTo>
-                  <a:lnTo>
-                    <a:pt x="931092" y="475162"/>
-                  </a:lnTo>
-                  <a:lnTo>
-                    <a:pt x="859470" y="472752"/>
-                  </a:lnTo>
-                  <a:lnTo>
-                    <a:pt x="787847" y="470336"/>
-                  </a:lnTo>
-                  <a:lnTo>
-                    <a:pt x="716225" y="467913"/>
-                  </a:lnTo>
-                  <a:lnTo>
-                    <a:pt x="644602" y="465484"/>
-                  </a:lnTo>
-                  <a:lnTo>
-                    <a:pt x="572980" y="463048"/>
-                  </a:lnTo>
-                  <a:lnTo>
-                    <a:pt x="501357" y="460605"/>
-                  </a:lnTo>
-                  <a:lnTo>
-                    <a:pt x="429735" y="458156"/>
-                  </a:lnTo>
-                  <a:lnTo>
-                    <a:pt x="358112" y="455701"/>
-                  </a:lnTo>
-                  <a:lnTo>
-                    <a:pt x="286490" y="453238"/>
-                  </a:lnTo>
-                  <a:lnTo>
-                    <a:pt x="214867" y="450770"/>
-                  </a:lnTo>
-                  <a:lnTo>
-                    <a:pt x="143245" y="448294"/>
-                  </a:lnTo>
-                  <a:lnTo>
-                    <a:pt x="71622" y="445812"/>
-                  </a:lnTo>
-                  <a:lnTo>
-                    <a:pt x="0" y="443323"/>
+                    <a:pt x="71622" y="15895"/>
+                  </a:lnTo>
+                  <a:lnTo>
+                    <a:pt x="143245" y="31605"/>
+                  </a:lnTo>
+                  <a:lnTo>
+                    <a:pt x="214867" y="47131"/>
+                  </a:lnTo>
+                  <a:lnTo>
+                    <a:pt x="286490" y="62477"/>
+                  </a:lnTo>
+                  <a:lnTo>
+                    <a:pt x="358112" y="77644"/>
+                  </a:lnTo>
+                  <a:lnTo>
+                    <a:pt x="429735" y="92633"/>
+                  </a:lnTo>
+                  <a:lnTo>
+                    <a:pt x="501357" y="107448"/>
+                  </a:lnTo>
+                  <a:lnTo>
+                    <a:pt x="572980" y="122091"/>
+                  </a:lnTo>
+                  <a:lnTo>
+                    <a:pt x="644602" y="136562"/>
+                  </a:lnTo>
+                  <a:lnTo>
+                    <a:pt x="716225" y="150865"/>
+                  </a:lnTo>
+                  <a:lnTo>
+                    <a:pt x="787847" y="165001"/>
+                  </a:lnTo>
+                  <a:lnTo>
+                    <a:pt x="859470" y="178972"/>
+                  </a:lnTo>
+                  <a:lnTo>
+                    <a:pt x="931092" y="192781"/>
+                  </a:lnTo>
+                  <a:lnTo>
+                    <a:pt x="1002715" y="206428"/>
+                  </a:lnTo>
+                  <a:lnTo>
+                    <a:pt x="1074337" y="219916"/>
+                  </a:lnTo>
+                  <a:lnTo>
+                    <a:pt x="1145960" y="233247"/>
+                  </a:lnTo>
+                  <a:lnTo>
+                    <a:pt x="1217582" y="246423"/>
+                  </a:lnTo>
+                  <a:lnTo>
+                    <a:pt x="1289205" y="259445"/>
+                  </a:lnTo>
+                  <a:lnTo>
+                    <a:pt x="1360827" y="272315"/>
+                  </a:lnTo>
+                  <a:lnTo>
+                    <a:pt x="1432450" y="285035"/>
+                  </a:lnTo>
+                  <a:lnTo>
+                    <a:pt x="1504073" y="297606"/>
+                  </a:lnTo>
+                  <a:lnTo>
+                    <a:pt x="1575695" y="310031"/>
+                  </a:lnTo>
+                  <a:lnTo>
+                    <a:pt x="1647318" y="322312"/>
+                  </a:lnTo>
+                  <a:lnTo>
+                    <a:pt x="1718940" y="334449"/>
+                  </a:lnTo>
+                  <a:lnTo>
+                    <a:pt x="1790563" y="346444"/>
+                  </a:lnTo>
+                  <a:lnTo>
+                    <a:pt x="1862185" y="358300"/>
+                  </a:lnTo>
+                  <a:lnTo>
+                    <a:pt x="1933808" y="370017"/>
+                  </a:lnTo>
+                  <a:lnTo>
+                    <a:pt x="2005430" y="381598"/>
+                  </a:lnTo>
+                  <a:lnTo>
+                    <a:pt x="2077053" y="393044"/>
+                  </a:lnTo>
+                  <a:lnTo>
+                    <a:pt x="2148675" y="404356"/>
+                  </a:lnTo>
+                  <a:lnTo>
+                    <a:pt x="2220298" y="415536"/>
+                  </a:lnTo>
+                  <a:lnTo>
+                    <a:pt x="2291920" y="426586"/>
+                  </a:lnTo>
+                  <a:lnTo>
+                    <a:pt x="2363543" y="437507"/>
+                  </a:lnTo>
+                  <a:lnTo>
+                    <a:pt x="2435165" y="448301"/>
+                  </a:lnTo>
+                  <a:lnTo>
+                    <a:pt x="2506788" y="458969"/>
+                  </a:lnTo>
+                  <a:lnTo>
+                    <a:pt x="2578410" y="469513"/>
+                  </a:lnTo>
+                  <a:lnTo>
+                    <a:pt x="2650033" y="479933"/>
+                  </a:lnTo>
+                  <a:lnTo>
+                    <a:pt x="2721655" y="490232"/>
+                  </a:lnTo>
+                  <a:lnTo>
+                    <a:pt x="2793278" y="500411"/>
+                  </a:lnTo>
+                  <a:lnTo>
+                    <a:pt x="2864901" y="510472"/>
+                  </a:lnTo>
+                  <a:lnTo>
+                    <a:pt x="2936523" y="520415"/>
+                  </a:lnTo>
+                  <a:lnTo>
+                    <a:pt x="3008146" y="530242"/>
+                  </a:lnTo>
+                  <a:lnTo>
+                    <a:pt x="3079768" y="535099"/>
+                  </a:lnTo>
+                  <a:lnTo>
+                    <a:pt x="3151391" y="537200"/>
+                  </a:lnTo>
+                  <a:lnTo>
+                    <a:pt x="3223013" y="539295"/>
+                  </a:lnTo>
+                  <a:lnTo>
+                    <a:pt x="3294636" y="541386"/>
+                  </a:lnTo>
+                  <a:lnTo>
+                    <a:pt x="3366258" y="543471"/>
+                  </a:lnTo>
+                  <a:lnTo>
+                    <a:pt x="3437881" y="545551"/>
+                  </a:lnTo>
+                  <a:lnTo>
+                    <a:pt x="3509503" y="547625"/>
+                  </a:lnTo>
+                  <a:lnTo>
+                    <a:pt x="3581126" y="549694"/>
+                  </a:lnTo>
+                  <a:lnTo>
+                    <a:pt x="3652748" y="551758"/>
+                  </a:lnTo>
+                  <a:lnTo>
+                    <a:pt x="3724371" y="553817"/>
+                  </a:lnTo>
+                  <a:lnTo>
+                    <a:pt x="3795993" y="555871"/>
+                  </a:lnTo>
+                  <a:lnTo>
+                    <a:pt x="3867616" y="557919"/>
+                  </a:lnTo>
+                  <a:lnTo>
+                    <a:pt x="3939238" y="559962"/>
+                  </a:lnTo>
+                  <a:lnTo>
+                    <a:pt x="4010861" y="562000"/>
+                  </a:lnTo>
+                  <a:lnTo>
+                    <a:pt x="4082483" y="564033"/>
+                  </a:lnTo>
+                  <a:lnTo>
+                    <a:pt x="4154106" y="566061"/>
+                  </a:lnTo>
+                  <a:lnTo>
+                    <a:pt x="4225729" y="568083"/>
+                  </a:lnTo>
+                  <a:lnTo>
+                    <a:pt x="4297351" y="570100"/>
+                  </a:lnTo>
+                  <a:lnTo>
+                    <a:pt x="4368974" y="572113"/>
+                  </a:lnTo>
+                  <a:lnTo>
+                    <a:pt x="4440596" y="574120"/>
+                  </a:lnTo>
+                  <a:lnTo>
+                    <a:pt x="4512219" y="576122"/>
+                  </a:lnTo>
+                  <a:lnTo>
+                    <a:pt x="4583841" y="578119"/>
+                  </a:lnTo>
+                  <a:lnTo>
+                    <a:pt x="4655464" y="580111"/>
+                  </a:lnTo>
+                  <a:lnTo>
+                    <a:pt x="4727086" y="582098"/>
+                  </a:lnTo>
+                  <a:lnTo>
+                    <a:pt x="4798709" y="584079"/>
+                  </a:lnTo>
+                  <a:lnTo>
+                    <a:pt x="4870331" y="586056"/>
+                  </a:lnTo>
+                  <a:lnTo>
+                    <a:pt x="4941954" y="588028"/>
+                  </a:lnTo>
+                  <a:lnTo>
+                    <a:pt x="5013576" y="589995"/>
+                  </a:lnTo>
+                  <a:lnTo>
+                    <a:pt x="5085199" y="591956"/>
+                  </a:lnTo>
+                  <a:lnTo>
+                    <a:pt x="5156821" y="593913"/>
+                  </a:lnTo>
+                  <a:lnTo>
+                    <a:pt x="5228444" y="595865"/>
+                  </a:lnTo>
+                  <a:lnTo>
+                    <a:pt x="5300066" y="597812"/>
+                  </a:lnTo>
+                  <a:lnTo>
+                    <a:pt x="5371689" y="599754"/>
+                  </a:lnTo>
+                  <a:lnTo>
+                    <a:pt x="5443311" y="601691"/>
+                  </a:lnTo>
+                  <a:lnTo>
+                    <a:pt x="5514934" y="603623"/>
+                  </a:lnTo>
+                  <a:lnTo>
+                    <a:pt x="5586557" y="605550"/>
+                  </a:lnTo>
+                  <a:lnTo>
+                    <a:pt x="5658179" y="607472"/>
+                  </a:lnTo>
+                  <a:lnTo>
+                    <a:pt x="5729802" y="609390"/>
+                  </a:lnTo>
+                  <a:lnTo>
+                    <a:pt x="5801424" y="611302"/>
+                  </a:lnTo>
+                  <a:lnTo>
+                    <a:pt x="5873047" y="613210"/>
+                  </a:lnTo>
+                  <a:lnTo>
+                    <a:pt x="5944669" y="615113"/>
+                  </a:lnTo>
+                  <a:lnTo>
+                    <a:pt x="6016292" y="617011"/>
+                  </a:lnTo>
+                  <a:lnTo>
+                    <a:pt x="6087914" y="618904"/>
+                  </a:lnTo>
+                  <a:lnTo>
+                    <a:pt x="6159537" y="620793"/>
+                  </a:lnTo>
+                  <a:lnTo>
+                    <a:pt x="6231159" y="622676"/>
+                  </a:lnTo>
+                  <a:lnTo>
+                    <a:pt x="6302782" y="624555"/>
+                  </a:lnTo>
+                  <a:lnTo>
+                    <a:pt x="6374404" y="626429"/>
+                  </a:lnTo>
+                  <a:lnTo>
+                    <a:pt x="6446027" y="628299"/>
+                  </a:lnTo>
+                  <a:lnTo>
+                    <a:pt x="6517649" y="630163"/>
+                  </a:lnTo>
+                  <a:lnTo>
+                    <a:pt x="6589272" y="632023"/>
+                  </a:lnTo>
+                  <a:lnTo>
+                    <a:pt x="6660894" y="633878"/>
+                  </a:lnTo>
+                  <a:lnTo>
+                    <a:pt x="6732517" y="635729"/>
+                  </a:lnTo>
+                  <a:lnTo>
+                    <a:pt x="6804139" y="637574"/>
+                  </a:lnTo>
+                  <a:lnTo>
+                    <a:pt x="6875762" y="639415"/>
+                  </a:lnTo>
+                  <a:lnTo>
+                    <a:pt x="6947385" y="641252"/>
+                  </a:lnTo>
+                  <a:lnTo>
+                    <a:pt x="7019007" y="643083"/>
+                  </a:lnTo>
+                  <a:lnTo>
+                    <a:pt x="7090630" y="644911"/>
+                  </a:lnTo>
+                  <a:lnTo>
+                    <a:pt x="7090630" y="936348"/>
+                  </a:lnTo>
+                  <a:lnTo>
+                    <a:pt x="7019007" y="931312"/>
+                  </a:lnTo>
+                  <a:lnTo>
+                    <a:pt x="6947385" y="926216"/>
+                  </a:lnTo>
+                  <a:lnTo>
+                    <a:pt x="6875762" y="921061"/>
+                  </a:lnTo>
+                  <a:lnTo>
+                    <a:pt x="6804139" y="915845"/>
+                  </a:lnTo>
+                  <a:lnTo>
+                    <a:pt x="6732517" y="910567"/>
+                  </a:lnTo>
+                  <a:lnTo>
+                    <a:pt x="6660894" y="905226"/>
+                  </a:lnTo>
+                  <a:lnTo>
+                    <a:pt x="6589272" y="899823"/>
+                  </a:lnTo>
+                  <a:lnTo>
+                    <a:pt x="6517649" y="894356"/>
+                  </a:lnTo>
+                  <a:lnTo>
+                    <a:pt x="6446027" y="888825"/>
+                  </a:lnTo>
+                  <a:lnTo>
+                    <a:pt x="6374404" y="883228"/>
+                  </a:lnTo>
+                  <a:lnTo>
+                    <a:pt x="6302782" y="877566"/>
+                  </a:lnTo>
+                  <a:lnTo>
+                    <a:pt x="6231159" y="871836"/>
+                  </a:lnTo>
+                  <a:lnTo>
+                    <a:pt x="6159537" y="866039"/>
+                  </a:lnTo>
+                  <a:lnTo>
+                    <a:pt x="6087914" y="860173"/>
+                  </a:lnTo>
+                  <a:lnTo>
+                    <a:pt x="6016292" y="854239"/>
+                  </a:lnTo>
+                  <a:lnTo>
+                    <a:pt x="5944669" y="848234"/>
+                  </a:lnTo>
+                  <a:lnTo>
+                    <a:pt x="5873047" y="842159"/>
+                  </a:lnTo>
+                  <a:lnTo>
+                    <a:pt x="5801424" y="836011"/>
+                  </a:lnTo>
+                  <a:lnTo>
+                    <a:pt x="5729802" y="829792"/>
+                  </a:lnTo>
+                  <a:lnTo>
+                    <a:pt x="5658179" y="823498"/>
+                  </a:lnTo>
+                  <a:lnTo>
+                    <a:pt x="5586557" y="817131"/>
+                  </a:lnTo>
+                  <a:lnTo>
+                    <a:pt x="5514934" y="810689"/>
+                  </a:lnTo>
+                  <a:lnTo>
+                    <a:pt x="5443311" y="804170"/>
+                  </a:lnTo>
+                  <a:lnTo>
+                    <a:pt x="5371689" y="797575"/>
+                  </a:lnTo>
+                  <a:lnTo>
+                    <a:pt x="5300066" y="790901"/>
+                  </a:lnTo>
+                  <a:lnTo>
+                    <a:pt x="5228444" y="784149"/>
+                  </a:lnTo>
+                  <a:lnTo>
+                    <a:pt x="5156821" y="777318"/>
+                  </a:lnTo>
+                  <a:lnTo>
+                    <a:pt x="5085199" y="770406"/>
+                  </a:lnTo>
+                  <a:lnTo>
+                    <a:pt x="5013576" y="763412"/>
+                  </a:lnTo>
+                  <a:lnTo>
+                    <a:pt x="4941954" y="756336"/>
+                  </a:lnTo>
+                  <a:lnTo>
+                    <a:pt x="4870331" y="749176"/>
+                  </a:lnTo>
+                  <a:lnTo>
+                    <a:pt x="4798709" y="741932"/>
+                  </a:lnTo>
+                  <a:lnTo>
+                    <a:pt x="4727086" y="734602"/>
+                  </a:lnTo>
+                  <a:lnTo>
+                    <a:pt x="4655464" y="727186"/>
+                  </a:lnTo>
+                  <a:lnTo>
+                    <a:pt x="4583841" y="719682"/>
+                  </a:lnTo>
+                  <a:lnTo>
+                    <a:pt x="4512219" y="712090"/>
+                  </a:lnTo>
+                  <a:lnTo>
+                    <a:pt x="4440596" y="704408"/>
+                  </a:lnTo>
+                  <a:lnTo>
+                    <a:pt x="4368974" y="696636"/>
+                  </a:lnTo>
+                  <a:lnTo>
+                    <a:pt x="4297351" y="688772"/>
+                  </a:lnTo>
+                  <a:lnTo>
+                    <a:pt x="4225729" y="680815"/>
+                  </a:lnTo>
+                  <a:lnTo>
+                    <a:pt x="4154106" y="672765"/>
+                  </a:lnTo>
+                  <a:lnTo>
+                    <a:pt x="4082483" y="664619"/>
+                  </a:lnTo>
+                  <a:lnTo>
+                    <a:pt x="4010861" y="656377"/>
+                  </a:lnTo>
+                  <a:lnTo>
+                    <a:pt x="3939238" y="648038"/>
+                  </a:lnTo>
+                  <a:lnTo>
+                    <a:pt x="3867616" y="639601"/>
+                  </a:lnTo>
+                  <a:lnTo>
+                    <a:pt x="3795993" y="631064"/>
+                  </a:lnTo>
+                  <a:lnTo>
+                    <a:pt x="3724371" y="622426"/>
+                  </a:lnTo>
+                  <a:lnTo>
+                    <a:pt x="3652748" y="613687"/>
+                  </a:lnTo>
+                  <a:lnTo>
+                    <a:pt x="3581126" y="604844"/>
+                  </a:lnTo>
+                  <a:lnTo>
+                    <a:pt x="3509503" y="595897"/>
+                  </a:lnTo>
+                  <a:lnTo>
+                    <a:pt x="3437881" y="586844"/>
+                  </a:lnTo>
+                  <a:lnTo>
+                    <a:pt x="3366258" y="577685"/>
+                  </a:lnTo>
+                  <a:lnTo>
+                    <a:pt x="3294636" y="568418"/>
+                  </a:lnTo>
+                  <a:lnTo>
+                    <a:pt x="3223013" y="559041"/>
+                  </a:lnTo>
+                  <a:lnTo>
+                    <a:pt x="3151391" y="549554"/>
+                  </a:lnTo>
+                  <a:lnTo>
+                    <a:pt x="3079768" y="539954"/>
+                  </a:lnTo>
+                  <a:lnTo>
+                    <a:pt x="3008146" y="532992"/>
+                  </a:lnTo>
+                  <a:lnTo>
+                    <a:pt x="2936523" y="530880"/>
+                  </a:lnTo>
+                  <a:lnTo>
+                    <a:pt x="2864901" y="528763"/>
+                  </a:lnTo>
+                  <a:lnTo>
+                    <a:pt x="2793278" y="526641"/>
+                  </a:lnTo>
+                  <a:lnTo>
+                    <a:pt x="2721655" y="524513"/>
+                  </a:lnTo>
+                  <a:lnTo>
+                    <a:pt x="2650033" y="522380"/>
+                  </a:lnTo>
+                  <a:lnTo>
+                    <a:pt x="2578410" y="520241"/>
+                  </a:lnTo>
+                  <a:lnTo>
+                    <a:pt x="2506788" y="518097"/>
+                  </a:lnTo>
+                  <a:lnTo>
+                    <a:pt x="2435165" y="515947"/>
+                  </a:lnTo>
+                  <a:lnTo>
+                    <a:pt x="2363543" y="513792"/>
+                  </a:lnTo>
+                  <a:lnTo>
+                    <a:pt x="2291920" y="511631"/>
+                  </a:lnTo>
+                  <a:lnTo>
+                    <a:pt x="2220298" y="509465"/>
+                  </a:lnTo>
+                  <a:lnTo>
+                    <a:pt x="2148675" y="507294"/>
+                  </a:lnTo>
+                  <a:lnTo>
+                    <a:pt x="2077053" y="505117"/>
+                  </a:lnTo>
+                  <a:lnTo>
+                    <a:pt x="2005430" y="502934"/>
+                  </a:lnTo>
+                  <a:lnTo>
+                    <a:pt x="1933808" y="500746"/>
+                  </a:lnTo>
+                  <a:lnTo>
+                    <a:pt x="1862185" y="498552"/>
+                  </a:lnTo>
+                  <a:lnTo>
+                    <a:pt x="1790563" y="496353"/>
+                  </a:lnTo>
+                  <a:lnTo>
+                    <a:pt x="1718940" y="494148"/>
+                  </a:lnTo>
+                  <a:lnTo>
+                    <a:pt x="1647318" y="491937"/>
+                  </a:lnTo>
+                  <a:lnTo>
+                    <a:pt x="1575695" y="489721"/>
+                  </a:lnTo>
+                  <a:lnTo>
+                    <a:pt x="1504073" y="487499"/>
+                  </a:lnTo>
+                  <a:lnTo>
+                    <a:pt x="1432450" y="485272"/>
+                  </a:lnTo>
+                  <a:lnTo>
+                    <a:pt x="1360827" y="483038"/>
+                  </a:lnTo>
+                  <a:lnTo>
+                    <a:pt x="1289205" y="480800"/>
+                  </a:lnTo>
+                  <a:lnTo>
+                    <a:pt x="1217582" y="478555"/>
+                  </a:lnTo>
+                  <a:lnTo>
+                    <a:pt x="1145960" y="476305"/>
+                  </a:lnTo>
+                  <a:lnTo>
+                    <a:pt x="1074337" y="474049"/>
+                  </a:lnTo>
+                  <a:lnTo>
+                    <a:pt x="1002715" y="471787"/>
+                  </a:lnTo>
+                  <a:lnTo>
+                    <a:pt x="931092" y="469520"/>
+                  </a:lnTo>
+                  <a:lnTo>
+                    <a:pt x="859470" y="467247"/>
+                  </a:lnTo>
+                  <a:lnTo>
+                    <a:pt x="787847" y="464968"/>
+                  </a:lnTo>
+                  <a:lnTo>
+                    <a:pt x="716225" y="462683"/>
+                  </a:lnTo>
+                  <a:lnTo>
+                    <a:pt x="644602" y="460392"/>
+                  </a:lnTo>
+                  <a:lnTo>
+                    <a:pt x="572980" y="458096"/>
+                  </a:lnTo>
+                  <a:lnTo>
+                    <a:pt x="501357" y="455794"/>
+                  </a:lnTo>
+                  <a:lnTo>
+                    <a:pt x="429735" y="453486"/>
+                  </a:lnTo>
+                  <a:lnTo>
+                    <a:pt x="358112" y="451172"/>
+                  </a:lnTo>
+                  <a:lnTo>
+                    <a:pt x="286490" y="448852"/>
+                  </a:lnTo>
+                  <a:lnTo>
+                    <a:pt x="214867" y="446526"/>
+                  </a:lnTo>
+                  <a:lnTo>
+                    <a:pt x="143245" y="444194"/>
+                  </a:lnTo>
+                  <a:lnTo>
+                    <a:pt x="71622" y="441857"/>
+                  </a:lnTo>
+                  <a:lnTo>
+                    <a:pt x="0" y="439513"/>
                   </a:lnTo>
                   <a:close/>
                 </a:path>
@@ -4020,312 +4020,312 @@
           </p:nvSpPr>
           <p:spPr>
             <a:xfrm>
-              <a:off x="1172049" y="4184672"/>
-              <a:ext cx="7090630" cy="660005"/>
+              <a:off x="1172049" y="4194034"/>
+              <a:ext cx="7090630" cy="644911"/>
             </a:xfrm>
             <a:custGeom>
               <a:avLst/>
               <a:pathLst>
-                <a:path w="7090630" h="660005">
+                <a:path w="7090630" h="644911">
                   <a:moveTo>
                     <a:pt x="0" y="0"/>
                   </a:moveTo>
                   <a:lnTo>
-                    <a:pt x="71622" y="16223"/>
-                  </a:lnTo>
-                  <a:lnTo>
-                    <a:pt x="143245" y="32255"/>
-                  </a:lnTo>
-                  <a:lnTo>
-                    <a:pt x="214867" y="48097"/>
-                  </a:lnTo>
-                  <a:lnTo>
-                    <a:pt x="286490" y="63752"/>
-                  </a:lnTo>
-                  <a:lnTo>
-                    <a:pt x="358112" y="79222"/>
-                  </a:lnTo>
-                  <a:lnTo>
-                    <a:pt x="429735" y="94509"/>
-                  </a:lnTo>
-                  <a:lnTo>
-                    <a:pt x="501357" y="109616"/>
-                  </a:lnTo>
-                  <a:lnTo>
-                    <a:pt x="572980" y="124543"/>
-                  </a:lnTo>
-                  <a:lnTo>
-                    <a:pt x="644602" y="139295"/>
-                  </a:lnTo>
-                  <a:lnTo>
-                    <a:pt x="716225" y="153872"/>
-                  </a:lnTo>
-                  <a:lnTo>
-                    <a:pt x="787847" y="168277"/>
-                  </a:lnTo>
-                  <a:lnTo>
-                    <a:pt x="859470" y="182511"/>
-                  </a:lnTo>
-                  <a:lnTo>
-                    <a:pt x="931092" y="196577"/>
-                  </a:lnTo>
-                  <a:lnTo>
-                    <a:pt x="1002715" y="210478"/>
-                  </a:lnTo>
-                  <a:lnTo>
-                    <a:pt x="1074337" y="224213"/>
-                  </a:lnTo>
-                  <a:lnTo>
-                    <a:pt x="1145960" y="237787"/>
-                  </a:lnTo>
-                  <a:lnTo>
-                    <a:pt x="1217582" y="251200"/>
-                  </a:lnTo>
-                  <a:lnTo>
-                    <a:pt x="1289205" y="264454"/>
-                  </a:lnTo>
-                  <a:lnTo>
-                    <a:pt x="1360827" y="277552"/>
-                  </a:lnTo>
-                  <a:lnTo>
-                    <a:pt x="1432450" y="290495"/>
-                  </a:lnTo>
-                  <a:lnTo>
-                    <a:pt x="1504073" y="303284"/>
-                  </a:lnTo>
-                  <a:lnTo>
-                    <a:pt x="1575695" y="315923"/>
-                  </a:lnTo>
-                  <a:lnTo>
-                    <a:pt x="1647318" y="328413"/>
-                  </a:lnTo>
-                  <a:lnTo>
-                    <a:pt x="1718940" y="340754"/>
-                  </a:lnTo>
-                  <a:lnTo>
-                    <a:pt x="1790563" y="352950"/>
-                  </a:lnTo>
-                  <a:lnTo>
-                    <a:pt x="1862185" y="365002"/>
-                  </a:lnTo>
-                  <a:lnTo>
-                    <a:pt x="1933808" y="376911"/>
-                  </a:lnTo>
-                  <a:lnTo>
-                    <a:pt x="2005430" y="388680"/>
-                  </a:lnTo>
-                  <a:lnTo>
-                    <a:pt x="2077053" y="400309"/>
-                  </a:lnTo>
-                  <a:lnTo>
-                    <a:pt x="2148675" y="411801"/>
-                  </a:lnTo>
-                  <a:lnTo>
-                    <a:pt x="2220298" y="423157"/>
-                  </a:lnTo>
-                  <a:lnTo>
-                    <a:pt x="2291920" y="434379"/>
-                  </a:lnTo>
-                  <a:lnTo>
-                    <a:pt x="2363543" y="445468"/>
-                  </a:lnTo>
-                  <a:lnTo>
-                    <a:pt x="2435165" y="456427"/>
-                  </a:lnTo>
-                  <a:lnTo>
-                    <a:pt x="2506788" y="467255"/>
-                  </a:lnTo>
-                  <a:lnTo>
-                    <a:pt x="2578410" y="477956"/>
-                  </a:lnTo>
-                  <a:lnTo>
-                    <a:pt x="2650033" y="488530"/>
-                  </a:lnTo>
-                  <a:lnTo>
-                    <a:pt x="2721655" y="498979"/>
-                  </a:lnTo>
-                  <a:lnTo>
-                    <a:pt x="2793278" y="509305"/>
-                  </a:lnTo>
-                  <a:lnTo>
-                    <a:pt x="2864901" y="519509"/>
-                  </a:lnTo>
-                  <a:lnTo>
-                    <a:pt x="2936523" y="529592"/>
-                  </a:lnTo>
-                  <a:lnTo>
-                    <a:pt x="3008146" y="539556"/>
-                  </a:lnTo>
-                  <a:lnTo>
-                    <a:pt x="3079768" y="544536"/>
-                  </a:lnTo>
-                  <a:lnTo>
-                    <a:pt x="3151391" y="546753"/>
-                  </a:lnTo>
-                  <a:lnTo>
-                    <a:pt x="3223013" y="548965"/>
-                  </a:lnTo>
-                  <a:lnTo>
-                    <a:pt x="3294636" y="551171"/>
-                  </a:lnTo>
-                  <a:lnTo>
-                    <a:pt x="3366258" y="553371"/>
-                  </a:lnTo>
-                  <a:lnTo>
-                    <a:pt x="3437881" y="555565"/>
-                  </a:lnTo>
-                  <a:lnTo>
-                    <a:pt x="3509503" y="557753"/>
-                  </a:lnTo>
-                  <a:lnTo>
-                    <a:pt x="3581126" y="559935"/>
-                  </a:lnTo>
-                  <a:lnTo>
-                    <a:pt x="3652748" y="562112"/>
-                  </a:lnTo>
-                  <a:lnTo>
-                    <a:pt x="3724371" y="564282"/>
-                  </a:lnTo>
-                  <a:lnTo>
-                    <a:pt x="3795993" y="566447"/>
-                  </a:lnTo>
-                  <a:lnTo>
-                    <a:pt x="3867616" y="568606"/>
-                  </a:lnTo>
-                  <a:lnTo>
-                    <a:pt x="3939238" y="570759"/>
-                  </a:lnTo>
-                  <a:lnTo>
-                    <a:pt x="4010861" y="572907"/>
-                  </a:lnTo>
-                  <a:lnTo>
-                    <a:pt x="4082483" y="575049"/>
-                  </a:lnTo>
-                  <a:lnTo>
-                    <a:pt x="4154106" y="577184"/>
-                  </a:lnTo>
-                  <a:lnTo>
-                    <a:pt x="4225729" y="579315"/>
-                  </a:lnTo>
-                  <a:lnTo>
-                    <a:pt x="4297351" y="581439"/>
-                  </a:lnTo>
-                  <a:lnTo>
-                    <a:pt x="4368974" y="583558"/>
-                  </a:lnTo>
-                  <a:lnTo>
-                    <a:pt x="4440596" y="585671"/>
-                  </a:lnTo>
-                  <a:lnTo>
-                    <a:pt x="4512219" y="587779"/>
-                  </a:lnTo>
-                  <a:lnTo>
-                    <a:pt x="4583841" y="589881"/>
-                  </a:lnTo>
-                  <a:lnTo>
-                    <a:pt x="4655464" y="591977"/>
-                  </a:lnTo>
-                  <a:lnTo>
-                    <a:pt x="4727086" y="594068"/>
-                  </a:lnTo>
-                  <a:lnTo>
-                    <a:pt x="4798709" y="596153"/>
-                  </a:lnTo>
-                  <a:lnTo>
-                    <a:pt x="4870331" y="598232"/>
-                  </a:lnTo>
-                  <a:lnTo>
-                    <a:pt x="4941954" y="600306"/>
-                  </a:lnTo>
-                  <a:lnTo>
-                    <a:pt x="5013576" y="602374"/>
-                  </a:lnTo>
-                  <a:lnTo>
-                    <a:pt x="5085199" y="604437"/>
-                  </a:lnTo>
-                  <a:lnTo>
-                    <a:pt x="5156821" y="606494"/>
-                  </a:lnTo>
-                  <a:lnTo>
-                    <a:pt x="5228444" y="608546"/>
-                  </a:lnTo>
-                  <a:lnTo>
-                    <a:pt x="5300066" y="610592"/>
-                  </a:lnTo>
-                  <a:lnTo>
-                    <a:pt x="5371689" y="612633"/>
-                  </a:lnTo>
-                  <a:lnTo>
-                    <a:pt x="5443311" y="614668"/>
-                  </a:lnTo>
-                  <a:lnTo>
-                    <a:pt x="5514934" y="616698"/>
-                  </a:lnTo>
-                  <a:lnTo>
-                    <a:pt x="5586557" y="618723"/>
-                  </a:lnTo>
-                  <a:lnTo>
-                    <a:pt x="5658179" y="620742"/>
-                  </a:lnTo>
-                  <a:lnTo>
-                    <a:pt x="5729802" y="622755"/>
-                  </a:lnTo>
-                  <a:lnTo>
-                    <a:pt x="5801424" y="624763"/>
-                  </a:lnTo>
-                  <a:lnTo>
-                    <a:pt x="5873047" y="626766"/>
-                  </a:lnTo>
-                  <a:lnTo>
-                    <a:pt x="5944669" y="628764"/>
-                  </a:lnTo>
-                  <a:lnTo>
-                    <a:pt x="6016292" y="630756"/>
-                  </a:lnTo>
-                  <a:lnTo>
-                    <a:pt x="6087914" y="632743"/>
-                  </a:lnTo>
-                  <a:lnTo>
-                    <a:pt x="6159537" y="634724"/>
-                  </a:lnTo>
-                  <a:lnTo>
-                    <a:pt x="6231159" y="636700"/>
-                  </a:lnTo>
-                  <a:lnTo>
-                    <a:pt x="6302782" y="638671"/>
-                  </a:lnTo>
-                  <a:lnTo>
-                    <a:pt x="6374404" y="640637"/>
-                  </a:lnTo>
-                  <a:lnTo>
-                    <a:pt x="6446027" y="642597"/>
-                  </a:lnTo>
-                  <a:lnTo>
-                    <a:pt x="6517649" y="644552"/>
-                  </a:lnTo>
-                  <a:lnTo>
-                    <a:pt x="6589272" y="646502"/>
-                  </a:lnTo>
-                  <a:lnTo>
-                    <a:pt x="6660894" y="648446"/>
-                  </a:lnTo>
-                  <a:lnTo>
-                    <a:pt x="6732517" y="650386"/>
-                  </a:lnTo>
-                  <a:lnTo>
-                    <a:pt x="6804139" y="652320"/>
-                  </a:lnTo>
-                  <a:lnTo>
-                    <a:pt x="6875762" y="654249"/>
-                  </a:lnTo>
-                  <a:lnTo>
-                    <a:pt x="6947385" y="656173"/>
-                  </a:lnTo>
-                  <a:lnTo>
-                    <a:pt x="7019007" y="658092"/>
-                  </a:lnTo>
-                  <a:lnTo>
-                    <a:pt x="7090630" y="660005"/>
+                    <a:pt x="71622" y="15895"/>
+                  </a:lnTo>
+                  <a:lnTo>
+                    <a:pt x="143245" y="31605"/>
+                  </a:lnTo>
+                  <a:lnTo>
+                    <a:pt x="214867" y="47131"/>
+                  </a:lnTo>
+                  <a:lnTo>
+                    <a:pt x="286490" y="62477"/>
+                  </a:lnTo>
+                  <a:lnTo>
+                    <a:pt x="358112" y="77644"/>
+                  </a:lnTo>
+                  <a:lnTo>
+                    <a:pt x="429735" y="92633"/>
+                  </a:lnTo>
+                  <a:lnTo>
+                    <a:pt x="501357" y="107448"/>
+                  </a:lnTo>
+                  <a:lnTo>
+                    <a:pt x="572980" y="122091"/>
+                  </a:lnTo>
+                  <a:lnTo>
+                    <a:pt x="644602" y="136562"/>
+                  </a:lnTo>
+                  <a:lnTo>
+                    <a:pt x="716225" y="150865"/>
+                  </a:lnTo>
+                  <a:lnTo>
+                    <a:pt x="787847" y="165001"/>
+                  </a:lnTo>
+                  <a:lnTo>
+                    <a:pt x="859470" y="178972"/>
+                  </a:lnTo>
+                  <a:lnTo>
+                    <a:pt x="931092" y="192781"/>
+                  </a:lnTo>
+                  <a:lnTo>
+                    <a:pt x="1002715" y="206428"/>
+                  </a:lnTo>
+                  <a:lnTo>
+                    <a:pt x="1074337" y="219916"/>
+                  </a:lnTo>
+                  <a:lnTo>
+                    <a:pt x="1145960" y="233247"/>
+                  </a:lnTo>
+                  <a:lnTo>
+                    <a:pt x="1217582" y="246423"/>
+                  </a:lnTo>
+                  <a:lnTo>
+                    <a:pt x="1289205" y="259445"/>
+                  </a:lnTo>
+                  <a:lnTo>
+                    <a:pt x="1360827" y="272315"/>
+                  </a:lnTo>
+                  <a:lnTo>
+                    <a:pt x="1432450" y="285035"/>
+                  </a:lnTo>
+                  <a:lnTo>
+                    <a:pt x="1504073" y="297606"/>
+                  </a:lnTo>
+                  <a:lnTo>
+                    <a:pt x="1575695" y="310031"/>
+                  </a:lnTo>
+                  <a:lnTo>
+                    <a:pt x="1647318" y="322312"/>
+                  </a:lnTo>
+                  <a:lnTo>
+                    <a:pt x="1718940" y="334449"/>
+                  </a:lnTo>
+                  <a:lnTo>
+                    <a:pt x="1790563" y="346444"/>
+                  </a:lnTo>
+                  <a:lnTo>
+                    <a:pt x="1862185" y="358300"/>
+                  </a:lnTo>
+                  <a:lnTo>
+                    <a:pt x="1933808" y="370017"/>
+                  </a:lnTo>
+                  <a:lnTo>
+                    <a:pt x="2005430" y="381598"/>
+                  </a:lnTo>
+                  <a:lnTo>
+                    <a:pt x="2077053" y="393044"/>
+                  </a:lnTo>
+                  <a:lnTo>
+                    <a:pt x="2148675" y="404356"/>
+                  </a:lnTo>
+                  <a:lnTo>
+                    <a:pt x="2220298" y="415536"/>
+                  </a:lnTo>
+                  <a:lnTo>
+                    <a:pt x="2291920" y="426586"/>
+                  </a:lnTo>
+                  <a:lnTo>
+                    <a:pt x="2363543" y="437507"/>
+                  </a:lnTo>
+                  <a:lnTo>
+                    <a:pt x="2435165" y="448301"/>
+                  </a:lnTo>
+                  <a:lnTo>
+                    <a:pt x="2506788" y="458969"/>
+                  </a:lnTo>
+                  <a:lnTo>
+                    <a:pt x="2578410" y="469513"/>
+                  </a:lnTo>
+                  <a:lnTo>
+                    <a:pt x="2650033" y="479933"/>
+                  </a:lnTo>
+                  <a:lnTo>
+                    <a:pt x="2721655" y="490232"/>
+                  </a:lnTo>
+                  <a:lnTo>
+                    <a:pt x="2793278" y="500411"/>
+                  </a:lnTo>
+                  <a:lnTo>
+                    <a:pt x="2864901" y="510472"/>
+                  </a:lnTo>
+                  <a:lnTo>
+                    <a:pt x="2936523" y="520415"/>
+                  </a:lnTo>
+                  <a:lnTo>
+                    <a:pt x="3008146" y="530242"/>
+                  </a:lnTo>
+                  <a:lnTo>
+                    <a:pt x="3079768" y="535099"/>
+                  </a:lnTo>
+                  <a:lnTo>
+                    <a:pt x="3151391" y="537200"/>
+                  </a:lnTo>
+                  <a:lnTo>
+                    <a:pt x="3223013" y="539295"/>
+                  </a:lnTo>
+                  <a:lnTo>
+                    <a:pt x="3294636" y="541386"/>
+                  </a:lnTo>
+                  <a:lnTo>
+                    <a:pt x="3366258" y="543471"/>
+                  </a:lnTo>
+                  <a:lnTo>
+                    <a:pt x="3437881" y="545551"/>
+                  </a:lnTo>
+                  <a:lnTo>
+                    <a:pt x="3509503" y="547625"/>
+                  </a:lnTo>
+                  <a:lnTo>
+                    <a:pt x="3581126" y="549694"/>
+                  </a:lnTo>
+                  <a:lnTo>
+                    <a:pt x="3652748" y="551758"/>
+                  </a:lnTo>
+                  <a:lnTo>
+                    <a:pt x="3724371" y="553817"/>
+                  </a:lnTo>
+                  <a:lnTo>
+                    <a:pt x="3795993" y="555871"/>
+                  </a:lnTo>
+                  <a:lnTo>
+                    <a:pt x="3867616" y="557919"/>
+                  </a:lnTo>
+                  <a:lnTo>
+                    <a:pt x="3939238" y="559962"/>
+                  </a:lnTo>
+                  <a:lnTo>
+                    <a:pt x="4010861" y="562000"/>
+                  </a:lnTo>
+                  <a:lnTo>
+                    <a:pt x="4082483" y="564033"/>
+                  </a:lnTo>
+                  <a:lnTo>
+                    <a:pt x="4154106" y="566061"/>
+                  </a:lnTo>
+                  <a:lnTo>
+                    <a:pt x="4225729" y="568083"/>
+                  </a:lnTo>
+                  <a:lnTo>
+                    <a:pt x="4297351" y="570100"/>
+                  </a:lnTo>
+                  <a:lnTo>
+                    <a:pt x="4368974" y="572113"/>
+                  </a:lnTo>
+                  <a:lnTo>
+                    <a:pt x="4440596" y="574120"/>
+                  </a:lnTo>
+                  <a:lnTo>
+                    <a:pt x="4512219" y="576122"/>
+                  </a:lnTo>
+                  <a:lnTo>
+                    <a:pt x="4583841" y="578119"/>
+                  </a:lnTo>
+                  <a:lnTo>
+                    <a:pt x="4655464" y="580111"/>
+                  </a:lnTo>
+                  <a:lnTo>
+                    <a:pt x="4727086" y="582098"/>
+                  </a:lnTo>
+                  <a:lnTo>
+                    <a:pt x="4798709" y="584079"/>
+                  </a:lnTo>
+                  <a:lnTo>
+                    <a:pt x="4870331" y="586056"/>
+                  </a:lnTo>
+                  <a:lnTo>
+                    <a:pt x="4941954" y="588028"/>
+                  </a:lnTo>
+                  <a:lnTo>
+                    <a:pt x="5013576" y="589995"/>
+                  </a:lnTo>
+                  <a:lnTo>
+                    <a:pt x="5085199" y="591956"/>
+                  </a:lnTo>
+                  <a:lnTo>
+                    <a:pt x="5156821" y="593913"/>
+                  </a:lnTo>
+                  <a:lnTo>
+                    <a:pt x="5228444" y="595865"/>
+                  </a:lnTo>
+                  <a:lnTo>
+                    <a:pt x="5300066" y="597812"/>
+                  </a:lnTo>
+                  <a:lnTo>
+                    <a:pt x="5371689" y="599754"/>
+                  </a:lnTo>
+                  <a:lnTo>
+                    <a:pt x="5443311" y="601691"/>
+                  </a:lnTo>
+                  <a:lnTo>
+                    <a:pt x="5514934" y="603623"/>
+                  </a:lnTo>
+                  <a:lnTo>
+                    <a:pt x="5586557" y="605550"/>
+                  </a:lnTo>
+                  <a:lnTo>
+                    <a:pt x="5658179" y="607472"/>
+                  </a:lnTo>
+                  <a:lnTo>
+                    <a:pt x="5729802" y="609390"/>
+                  </a:lnTo>
+                  <a:lnTo>
+                    <a:pt x="5801424" y="611302"/>
+                  </a:lnTo>
+                  <a:lnTo>
+                    <a:pt x="5873047" y="613210"/>
+                  </a:lnTo>
+                  <a:lnTo>
+                    <a:pt x="5944669" y="615113"/>
+                  </a:lnTo>
+                  <a:lnTo>
+                    <a:pt x="6016292" y="617011"/>
+                  </a:lnTo>
+                  <a:lnTo>
+                    <a:pt x="6087914" y="618904"/>
+                  </a:lnTo>
+                  <a:lnTo>
+                    <a:pt x="6159537" y="620793"/>
+                  </a:lnTo>
+                  <a:lnTo>
+                    <a:pt x="6231159" y="622676"/>
+                  </a:lnTo>
+                  <a:lnTo>
+                    <a:pt x="6302782" y="624555"/>
+                  </a:lnTo>
+                  <a:lnTo>
+                    <a:pt x="6374404" y="626429"/>
+                  </a:lnTo>
+                  <a:lnTo>
+                    <a:pt x="6446027" y="628299"/>
+                  </a:lnTo>
+                  <a:lnTo>
+                    <a:pt x="6517649" y="630163"/>
+                  </a:lnTo>
+                  <a:lnTo>
+                    <a:pt x="6589272" y="632023"/>
+                  </a:lnTo>
+                  <a:lnTo>
+                    <a:pt x="6660894" y="633878"/>
+                  </a:lnTo>
+                  <a:lnTo>
+                    <a:pt x="6732517" y="635729"/>
+                  </a:lnTo>
+                  <a:lnTo>
+                    <a:pt x="6804139" y="637574"/>
+                  </a:lnTo>
+                  <a:lnTo>
+                    <a:pt x="6875762" y="639415"/>
+                  </a:lnTo>
+                  <a:lnTo>
+                    <a:pt x="6947385" y="641252"/>
+                  </a:lnTo>
+                  <a:lnTo>
+                    <a:pt x="7019007" y="643083"/>
+                  </a:lnTo>
+                  <a:lnTo>
+                    <a:pt x="7090630" y="644911"/>
                   </a:lnTo>
                 </a:path>
               </a:pathLst>
@@ -4345,309 +4345,309 @@
           </p:nvSpPr>
           <p:spPr>
             <a:xfrm>
-              <a:off x="1172049" y="4627996"/>
-              <a:ext cx="7090630" cy="506275"/>
+              <a:off x="1172049" y="4633548"/>
+              <a:ext cx="7090630" cy="496834"/>
             </a:xfrm>
             <a:custGeom>
               <a:avLst/>
               <a:pathLst>
-                <a:path w="7090630" h="506275">
+                <a:path w="7090630" h="496834">
                   <a:moveTo>
-                    <a:pt x="7090630" y="506275"/>
+                    <a:pt x="7090630" y="496834"/>
                   </a:moveTo>
                   <a:lnTo>
-                    <a:pt x="7019007" y="501215"/>
-                  </a:lnTo>
-                  <a:lnTo>
-                    <a:pt x="6947385" y="496096"/>
-                  </a:lnTo>
-                  <a:lnTo>
-                    <a:pt x="6875762" y="490915"/>
-                  </a:lnTo>
-                  <a:lnTo>
-                    <a:pt x="6804139" y="485672"/>
-                  </a:lnTo>
-                  <a:lnTo>
-                    <a:pt x="6732517" y="480366"/>
-                  </a:lnTo>
-                  <a:lnTo>
-                    <a:pt x="6660894" y="474997"/>
-                  </a:lnTo>
-                  <a:lnTo>
-                    <a:pt x="6589272" y="469563"/>
-                  </a:lnTo>
-                  <a:lnTo>
-                    <a:pt x="6517649" y="464065"/>
-                  </a:lnTo>
-                  <a:lnTo>
-                    <a:pt x="6446027" y="458501"/>
-                  </a:lnTo>
-                  <a:lnTo>
-                    <a:pt x="6374404" y="452870"/>
-                  </a:lnTo>
-                  <a:lnTo>
-                    <a:pt x="6302782" y="447172"/>
-                  </a:lnTo>
-                  <a:lnTo>
-                    <a:pt x="6231159" y="441406"/>
-                  </a:lnTo>
-                  <a:lnTo>
-                    <a:pt x="6159537" y="435570"/>
-                  </a:lnTo>
-                  <a:lnTo>
-                    <a:pt x="6087914" y="429665"/>
-                  </a:lnTo>
-                  <a:lnTo>
-                    <a:pt x="6016292" y="423690"/>
-                  </a:lnTo>
-                  <a:lnTo>
-                    <a:pt x="5944669" y="417643"/>
-                  </a:lnTo>
-                  <a:lnTo>
-                    <a:pt x="5873047" y="411523"/>
-                  </a:lnTo>
-                  <a:lnTo>
-                    <a:pt x="5801424" y="405331"/>
-                  </a:lnTo>
-                  <a:lnTo>
-                    <a:pt x="5729802" y="399064"/>
-                  </a:lnTo>
-                  <a:lnTo>
-                    <a:pt x="5658179" y="392722"/>
-                  </a:lnTo>
-                  <a:lnTo>
-                    <a:pt x="5586557" y="386305"/>
-                  </a:lnTo>
-                  <a:lnTo>
-                    <a:pt x="5514934" y="379811"/>
-                  </a:lnTo>
-                  <a:lnTo>
-                    <a:pt x="5443311" y="373239"/>
-                  </a:lnTo>
-                  <a:lnTo>
-                    <a:pt x="5371689" y="366588"/>
-                  </a:lnTo>
-                  <a:lnTo>
-                    <a:pt x="5300066" y="359858"/>
-                  </a:lnTo>
-                  <a:lnTo>
-                    <a:pt x="5228444" y="353047"/>
-                  </a:lnTo>
-                  <a:lnTo>
-                    <a:pt x="5156821" y="346155"/>
-                  </a:lnTo>
-                  <a:lnTo>
-                    <a:pt x="5085199" y="339181"/>
-                  </a:lnTo>
-                  <a:lnTo>
-                    <a:pt x="5013576" y="332123"/>
-                  </a:lnTo>
-                  <a:lnTo>
-                    <a:pt x="4941954" y="324981"/>
-                  </a:lnTo>
-                  <a:lnTo>
-                    <a:pt x="4870331" y="317753"/>
-                  </a:lnTo>
-                  <a:lnTo>
-                    <a:pt x="4798709" y="310439"/>
-                  </a:lnTo>
-                  <a:lnTo>
-                    <a:pt x="4727086" y="303037"/>
-                  </a:lnTo>
-                  <a:lnTo>
-                    <a:pt x="4655464" y="295547"/>
-                  </a:lnTo>
-                  <a:lnTo>
-                    <a:pt x="4583841" y="287967"/>
-                  </a:lnTo>
-                  <a:lnTo>
-                    <a:pt x="4512219" y="280296"/>
-                  </a:lnTo>
-                  <a:lnTo>
-                    <a:pt x="4440596" y="272534"/>
-                  </a:lnTo>
-                  <a:lnTo>
-                    <a:pt x="4368974" y="264679"/>
-                  </a:lnTo>
-                  <a:lnTo>
-                    <a:pt x="4297351" y="256730"/>
-                  </a:lnTo>
-                  <a:lnTo>
-                    <a:pt x="4225729" y="248686"/>
-                  </a:lnTo>
-                  <a:lnTo>
-                    <a:pt x="4154106" y="240545"/>
-                  </a:lnTo>
-                  <a:lnTo>
-                    <a:pt x="4082483" y="232308"/>
-                  </a:lnTo>
-                  <a:lnTo>
-                    <a:pt x="4010861" y="223971"/>
-                  </a:lnTo>
-                  <a:lnTo>
-                    <a:pt x="3939238" y="215535"/>
-                  </a:lnTo>
-                  <a:lnTo>
-                    <a:pt x="3867616" y="206999"/>
-                  </a:lnTo>
-                  <a:lnTo>
-                    <a:pt x="3795993" y="198360"/>
-                  </a:lnTo>
-                  <a:lnTo>
-                    <a:pt x="3724371" y="189617"/>
-                  </a:lnTo>
-                  <a:lnTo>
-                    <a:pt x="3652748" y="180770"/>
-                  </a:lnTo>
-                  <a:lnTo>
-                    <a:pt x="3581126" y="171818"/>
-                  </a:lnTo>
-                  <a:lnTo>
-                    <a:pt x="3509503" y="162758"/>
-                  </a:lnTo>
-                  <a:lnTo>
-                    <a:pt x="3437881" y="153590"/>
-                  </a:lnTo>
-                  <a:lnTo>
-                    <a:pt x="3366258" y="144312"/>
-                  </a:lnTo>
-                  <a:lnTo>
-                    <a:pt x="3294636" y="134923"/>
-                  </a:lnTo>
-                  <a:lnTo>
-                    <a:pt x="3223013" y="125422"/>
-                  </a:lnTo>
-                  <a:lnTo>
-                    <a:pt x="3151391" y="115808"/>
-                  </a:lnTo>
-                  <a:lnTo>
-                    <a:pt x="3079768" y="106078"/>
-                  </a:lnTo>
-                  <a:lnTo>
-                    <a:pt x="3008146" y="98988"/>
-                  </a:lnTo>
-                  <a:lnTo>
-                    <a:pt x="2936523" y="96759"/>
-                  </a:lnTo>
-                  <a:lnTo>
-                    <a:pt x="2864901" y="94523"/>
-                  </a:lnTo>
-                  <a:lnTo>
-                    <a:pt x="2793278" y="92281"/>
-                  </a:lnTo>
-                  <a:lnTo>
-                    <a:pt x="2721655" y="90034"/>
-                  </a:lnTo>
-                  <a:lnTo>
-                    <a:pt x="2650033" y="87780"/>
-                  </a:lnTo>
-                  <a:lnTo>
-                    <a:pt x="2578410" y="85520"/>
-                  </a:lnTo>
-                  <a:lnTo>
-                    <a:pt x="2506788" y="83255"/>
-                  </a:lnTo>
-                  <a:lnTo>
-                    <a:pt x="2435165" y="80983"/>
-                  </a:lnTo>
-                  <a:lnTo>
-                    <a:pt x="2363543" y="78705"/>
-                  </a:lnTo>
-                  <a:lnTo>
-                    <a:pt x="2291920" y="76421"/>
-                  </a:lnTo>
-                  <a:lnTo>
-                    <a:pt x="2220298" y="74130"/>
-                  </a:lnTo>
-                  <a:lnTo>
-                    <a:pt x="2148675" y="71834"/>
-                  </a:lnTo>
-                  <a:lnTo>
-                    <a:pt x="2077053" y="69531"/>
-                  </a:lnTo>
-                  <a:lnTo>
-                    <a:pt x="2005430" y="67223"/>
-                  </a:lnTo>
-                  <a:lnTo>
-                    <a:pt x="1933808" y="64908"/>
-                  </a:lnTo>
-                  <a:lnTo>
-                    <a:pt x="1862185" y="62587"/>
-                  </a:lnTo>
-                  <a:lnTo>
-                    <a:pt x="1790563" y="60259"/>
-                  </a:lnTo>
-                  <a:lnTo>
-                    <a:pt x="1718940" y="57926"/>
-                  </a:lnTo>
-                  <a:lnTo>
-                    <a:pt x="1647318" y="55586"/>
-                  </a:lnTo>
-                  <a:lnTo>
-                    <a:pt x="1575695" y="53240"/>
-                  </a:lnTo>
-                  <a:lnTo>
-                    <a:pt x="1504073" y="50887"/>
-                  </a:lnTo>
-                  <a:lnTo>
-                    <a:pt x="1432450" y="48528"/>
-                  </a:lnTo>
-                  <a:lnTo>
-                    <a:pt x="1360827" y="46163"/>
-                  </a:lnTo>
-                  <a:lnTo>
-                    <a:pt x="1289205" y="43792"/>
-                  </a:lnTo>
-                  <a:lnTo>
-                    <a:pt x="1217582" y="41414"/>
-                  </a:lnTo>
-                  <a:lnTo>
-                    <a:pt x="1145960" y="39030"/>
-                  </a:lnTo>
-                  <a:lnTo>
-                    <a:pt x="1074337" y="36639"/>
-                  </a:lnTo>
-                  <a:lnTo>
-                    <a:pt x="1002715" y="34242"/>
-                  </a:lnTo>
-                  <a:lnTo>
-                    <a:pt x="931092" y="31839"/>
-                  </a:lnTo>
-                  <a:lnTo>
-                    <a:pt x="859470" y="29429"/>
-                  </a:lnTo>
-                  <a:lnTo>
-                    <a:pt x="787847" y="27012"/>
-                  </a:lnTo>
-                  <a:lnTo>
-                    <a:pt x="716225" y="24589"/>
-                  </a:lnTo>
-                  <a:lnTo>
-                    <a:pt x="644602" y="22160"/>
-                  </a:lnTo>
-                  <a:lnTo>
-                    <a:pt x="572980" y="19724"/>
-                  </a:lnTo>
-                  <a:lnTo>
-                    <a:pt x="501357" y="17281"/>
-                  </a:lnTo>
-                  <a:lnTo>
-                    <a:pt x="429735" y="14832"/>
-                  </a:lnTo>
-                  <a:lnTo>
-                    <a:pt x="358112" y="12377"/>
-                  </a:lnTo>
-                  <a:lnTo>
-                    <a:pt x="286490" y="9915"/>
-                  </a:lnTo>
-                  <a:lnTo>
-                    <a:pt x="214867" y="7446"/>
-                  </a:lnTo>
-                  <a:lnTo>
-                    <a:pt x="143245" y="4970"/>
-                  </a:lnTo>
-                  <a:lnTo>
-                    <a:pt x="71622" y="2488"/>
+                    <a:pt x="7019007" y="491798"/>
+                  </a:lnTo>
+                  <a:lnTo>
+                    <a:pt x="6947385" y="486703"/>
+                  </a:lnTo>
+                  <a:lnTo>
+                    <a:pt x="6875762" y="481547"/>
+                  </a:lnTo>
+                  <a:lnTo>
+                    <a:pt x="6804139" y="476331"/>
+                  </a:lnTo>
+                  <a:lnTo>
+                    <a:pt x="6732517" y="471053"/>
+                  </a:lnTo>
+                  <a:lnTo>
+                    <a:pt x="6660894" y="465713"/>
+                  </a:lnTo>
+                  <a:lnTo>
+                    <a:pt x="6589272" y="460310"/>
+                  </a:lnTo>
+                  <a:lnTo>
+                    <a:pt x="6517649" y="454843"/>
+                  </a:lnTo>
+                  <a:lnTo>
+                    <a:pt x="6446027" y="449311"/>
+                  </a:lnTo>
+                  <a:lnTo>
+                    <a:pt x="6374404" y="443715"/>
+                  </a:lnTo>
+                  <a:lnTo>
+                    <a:pt x="6302782" y="438052"/>
+                  </a:lnTo>
+                  <a:lnTo>
+                    <a:pt x="6231159" y="432322"/>
+                  </a:lnTo>
+                  <a:lnTo>
+                    <a:pt x="6159537" y="426525"/>
+                  </a:lnTo>
+                  <a:lnTo>
+                    <a:pt x="6087914" y="420660"/>
+                  </a:lnTo>
+                  <a:lnTo>
+                    <a:pt x="6016292" y="414725"/>
+                  </a:lnTo>
+                  <a:lnTo>
+                    <a:pt x="5944669" y="408720"/>
+                  </a:lnTo>
+                  <a:lnTo>
+                    <a:pt x="5873047" y="402645"/>
+                  </a:lnTo>
+                  <a:lnTo>
+                    <a:pt x="5801424" y="396498"/>
+                  </a:lnTo>
+                  <a:lnTo>
+                    <a:pt x="5729802" y="390278"/>
+                  </a:lnTo>
+                  <a:lnTo>
+                    <a:pt x="5658179" y="383985"/>
+                  </a:lnTo>
+                  <a:lnTo>
+                    <a:pt x="5586557" y="377617"/>
+                  </a:lnTo>
+                  <a:lnTo>
+                    <a:pt x="5514934" y="371175"/>
+                  </a:lnTo>
+                  <a:lnTo>
+                    <a:pt x="5443311" y="364656"/>
+                  </a:lnTo>
+                  <a:lnTo>
+                    <a:pt x="5371689" y="358061"/>
+                  </a:lnTo>
+                  <a:lnTo>
+                    <a:pt x="5300066" y="351388"/>
+                  </a:lnTo>
+                  <a:lnTo>
+                    <a:pt x="5228444" y="344636"/>
+                  </a:lnTo>
+                  <a:lnTo>
+                    <a:pt x="5156821" y="337804"/>
+                  </a:lnTo>
+                  <a:lnTo>
+                    <a:pt x="5085199" y="330892"/>
+                  </a:lnTo>
+                  <a:lnTo>
+                    <a:pt x="5013576" y="323898"/>
+                  </a:lnTo>
+                  <a:lnTo>
+                    <a:pt x="4941954" y="316822"/>
+                  </a:lnTo>
+                  <a:lnTo>
+                    <a:pt x="4870331" y="309662"/>
+                  </a:lnTo>
+                  <a:lnTo>
+                    <a:pt x="4798709" y="302418"/>
+                  </a:lnTo>
+                  <a:lnTo>
+                    <a:pt x="4727086" y="295088"/>
+                  </a:lnTo>
+                  <a:lnTo>
+                    <a:pt x="4655464" y="287672"/>
+                  </a:lnTo>
+                  <a:lnTo>
+                    <a:pt x="4583841" y="280169"/>
+                  </a:lnTo>
+                  <a:lnTo>
+                    <a:pt x="4512219" y="272577"/>
+                  </a:lnTo>
+                  <a:lnTo>
+                    <a:pt x="4440596" y="264895"/>
+                  </a:lnTo>
+                  <a:lnTo>
+                    <a:pt x="4368974" y="257122"/>
+                  </a:lnTo>
+                  <a:lnTo>
+                    <a:pt x="4297351" y="249258"/>
+                  </a:lnTo>
+                  <a:lnTo>
+                    <a:pt x="4225729" y="241302"/>
+                  </a:lnTo>
+                  <a:lnTo>
+                    <a:pt x="4154106" y="233251"/>
+                  </a:lnTo>
+                  <a:lnTo>
+                    <a:pt x="4082483" y="225105"/>
+                  </a:lnTo>
+                  <a:lnTo>
+                    <a:pt x="4010861" y="216863"/>
+                  </a:lnTo>
+                  <a:lnTo>
+                    <a:pt x="3939238" y="208524"/>
+                  </a:lnTo>
+                  <a:lnTo>
+                    <a:pt x="3867616" y="200087"/>
+                  </a:lnTo>
+                  <a:lnTo>
+                    <a:pt x="3795993" y="191550"/>
+                  </a:lnTo>
+                  <a:lnTo>
+                    <a:pt x="3724371" y="182913"/>
+                  </a:lnTo>
+                  <a:lnTo>
+                    <a:pt x="3652748" y="174173"/>
+                  </a:lnTo>
+                  <a:lnTo>
+                    <a:pt x="3581126" y="165330"/>
+                  </a:lnTo>
+                  <a:lnTo>
+                    <a:pt x="3509503" y="156383"/>
+                  </a:lnTo>
+                  <a:lnTo>
+                    <a:pt x="3437881" y="147331"/>
+                  </a:lnTo>
+                  <a:lnTo>
+                    <a:pt x="3366258" y="138171"/>
+                  </a:lnTo>
+                  <a:lnTo>
+                    <a:pt x="3294636" y="128904"/>
+                  </a:lnTo>
+                  <a:lnTo>
+                    <a:pt x="3223013" y="119527"/>
+                  </a:lnTo>
+                  <a:lnTo>
+                    <a:pt x="3151391" y="110040"/>
+                  </a:lnTo>
+                  <a:lnTo>
+                    <a:pt x="3079768" y="100441"/>
+                  </a:lnTo>
+                  <a:lnTo>
+                    <a:pt x="3008146" y="93479"/>
+                  </a:lnTo>
+                  <a:lnTo>
+                    <a:pt x="2936523" y="91367"/>
+                  </a:lnTo>
+                  <a:lnTo>
+                    <a:pt x="2864901" y="89250"/>
+                  </a:lnTo>
+                  <a:lnTo>
+                    <a:pt x="2793278" y="87127"/>
+                  </a:lnTo>
+                  <a:lnTo>
+                    <a:pt x="2721655" y="84999"/>
+                  </a:lnTo>
+                  <a:lnTo>
+                    <a:pt x="2650033" y="82866"/>
+                  </a:lnTo>
+                  <a:lnTo>
+                    <a:pt x="2578410" y="80727"/>
+                  </a:lnTo>
+                  <a:lnTo>
+                    <a:pt x="2506788" y="78583"/>
+                  </a:lnTo>
+                  <a:lnTo>
+                    <a:pt x="2435165" y="76433"/>
+                  </a:lnTo>
+                  <a:lnTo>
+                    <a:pt x="2363543" y="74278"/>
+                  </a:lnTo>
+                  <a:lnTo>
+                    <a:pt x="2291920" y="72118"/>
+                  </a:lnTo>
+                  <a:lnTo>
+                    <a:pt x="2220298" y="69952"/>
+                  </a:lnTo>
+                  <a:lnTo>
+                    <a:pt x="2148675" y="67780"/>
+                  </a:lnTo>
+                  <a:lnTo>
+                    <a:pt x="2077053" y="65603"/>
+                  </a:lnTo>
+                  <a:lnTo>
+                    <a:pt x="2005430" y="63420"/>
+                  </a:lnTo>
+                  <a:lnTo>
+                    <a:pt x="1933808" y="61232"/>
+                  </a:lnTo>
+                  <a:lnTo>
+                    <a:pt x="1862185" y="59038"/>
+                  </a:lnTo>
+                  <a:lnTo>
+                    <a:pt x="1790563" y="56839"/>
+                  </a:lnTo>
+                  <a:lnTo>
+                    <a:pt x="1718940" y="54634"/>
+                  </a:lnTo>
+                  <a:lnTo>
+                    <a:pt x="1647318" y="52423"/>
+                  </a:lnTo>
+                  <a:lnTo>
+                    <a:pt x="1575695" y="50207"/>
+                  </a:lnTo>
+                  <a:lnTo>
+                    <a:pt x="1504073" y="47985"/>
+                  </a:lnTo>
+                  <a:lnTo>
+                    <a:pt x="1432450" y="45758"/>
+                  </a:lnTo>
+                  <a:lnTo>
+                    <a:pt x="1360827" y="43525"/>
+                  </a:lnTo>
+                  <a:lnTo>
+                    <a:pt x="1289205" y="41286"/>
+                  </a:lnTo>
+                  <a:lnTo>
+                    <a:pt x="1217582" y="39042"/>
+                  </a:lnTo>
+                  <a:lnTo>
+                    <a:pt x="1145960" y="36791"/>
+                  </a:lnTo>
+                  <a:lnTo>
+                    <a:pt x="1074337" y="34535"/>
+                  </a:lnTo>
+                  <a:lnTo>
+                    <a:pt x="1002715" y="32274"/>
+                  </a:lnTo>
+                  <a:lnTo>
+                    <a:pt x="931092" y="30006"/>
+                  </a:lnTo>
+                  <a:lnTo>
+                    <a:pt x="859470" y="27733"/>
+                  </a:lnTo>
+                  <a:lnTo>
+                    <a:pt x="787847" y="25454"/>
+                  </a:lnTo>
+                  <a:lnTo>
+                    <a:pt x="716225" y="23169"/>
+                  </a:lnTo>
+                  <a:lnTo>
+                    <a:pt x="644602" y="20879"/>
+                  </a:lnTo>
+                  <a:lnTo>
+                    <a:pt x="572980" y="18582"/>
+                  </a:lnTo>
+                  <a:lnTo>
+                    <a:pt x="501357" y="16280"/>
+                  </a:lnTo>
+                  <a:lnTo>
+                    <a:pt x="429735" y="13972"/>
+                  </a:lnTo>
+                  <a:lnTo>
+                    <a:pt x="358112" y="11658"/>
+                  </a:lnTo>
+                  <a:lnTo>
+                    <a:pt x="286490" y="9338"/>
+                  </a:lnTo>
+                  <a:lnTo>
+                    <a:pt x="214867" y="7012"/>
+                  </a:lnTo>
+                  <a:lnTo>
+                    <a:pt x="143245" y="4681"/>
+                  </a:lnTo>
+                  <a:lnTo>
+                    <a:pt x="71622" y="2343"/>
                   </a:lnTo>
                   <a:lnTo>
                     <a:pt x="0" y="0"/>
@@ -4670,312 +4670,312 @@
           </p:nvSpPr>
           <p:spPr>
             <a:xfrm>
-              <a:off x="1172049" y="4427882"/>
-              <a:ext cx="7090630" cy="580366"/>
+              <a:off x="1172049" y="4435107"/>
+              <a:ext cx="7090630" cy="568409"/>
             </a:xfrm>
             <a:custGeom>
               <a:avLst/>
               <a:pathLst>
-                <a:path w="7090630" h="580366">
+                <a:path w="7090630" h="568409">
                   <a:moveTo>
                     <a:pt x="0" y="0"/>
                   </a:moveTo>
                   <a:lnTo>
-                    <a:pt x="71622" y="8198"/>
-                  </a:lnTo>
-                  <a:lnTo>
-                    <a:pt x="143245" y="16337"/>
-                  </a:lnTo>
-                  <a:lnTo>
-                    <a:pt x="214867" y="24417"/>
-                  </a:lnTo>
-                  <a:lnTo>
-                    <a:pt x="286490" y="32439"/>
-                  </a:lnTo>
-                  <a:lnTo>
-                    <a:pt x="358112" y="40402"/>
-                  </a:lnTo>
-                  <a:lnTo>
-                    <a:pt x="429735" y="48307"/>
-                  </a:lnTo>
-                  <a:lnTo>
-                    <a:pt x="501357" y="56155"/>
-                  </a:lnTo>
-                  <a:lnTo>
-                    <a:pt x="572980" y="63946"/>
-                  </a:lnTo>
-                  <a:lnTo>
-                    <a:pt x="644602" y="71681"/>
-                  </a:lnTo>
-                  <a:lnTo>
-                    <a:pt x="716225" y="79359"/>
-                  </a:lnTo>
-                  <a:lnTo>
-                    <a:pt x="787847" y="86982"/>
-                  </a:lnTo>
-                  <a:lnTo>
-                    <a:pt x="859470" y="94549"/>
-                  </a:lnTo>
-                  <a:lnTo>
-                    <a:pt x="931092" y="102061"/>
-                  </a:lnTo>
-                  <a:lnTo>
-                    <a:pt x="1002715" y="109519"/>
-                  </a:lnTo>
-                  <a:lnTo>
-                    <a:pt x="1074337" y="116922"/>
-                  </a:lnTo>
-                  <a:lnTo>
-                    <a:pt x="1145960" y="124272"/>
-                  </a:lnTo>
-                  <a:lnTo>
-                    <a:pt x="1217582" y="131569"/>
-                  </a:lnTo>
-                  <a:lnTo>
-                    <a:pt x="1289205" y="138812"/>
-                  </a:lnTo>
-                  <a:lnTo>
-                    <a:pt x="1360827" y="146003"/>
-                  </a:lnTo>
-                  <a:lnTo>
-                    <a:pt x="1432450" y="153142"/>
-                  </a:lnTo>
-                  <a:lnTo>
-                    <a:pt x="1504073" y="160229"/>
-                  </a:lnTo>
-                  <a:lnTo>
-                    <a:pt x="1575695" y="167264"/>
-                  </a:lnTo>
-                  <a:lnTo>
-                    <a:pt x="1647318" y="174249"/>
-                  </a:lnTo>
-                  <a:lnTo>
-                    <a:pt x="1718940" y="181182"/>
-                  </a:lnTo>
-                  <a:lnTo>
-                    <a:pt x="1790563" y="188066"/>
-                  </a:lnTo>
-                  <a:lnTo>
-                    <a:pt x="1862185" y="194899"/>
-                  </a:lnTo>
-                  <a:lnTo>
-                    <a:pt x="1933808" y="201683"/>
-                  </a:lnTo>
-                  <a:lnTo>
-                    <a:pt x="2005430" y="208417"/>
-                  </a:lnTo>
-                  <a:lnTo>
-                    <a:pt x="2077053" y="215103"/>
-                  </a:lnTo>
-                  <a:lnTo>
-                    <a:pt x="2148675" y="221740"/>
-                  </a:lnTo>
-                  <a:lnTo>
-                    <a:pt x="2220298" y="228329"/>
-                  </a:lnTo>
-                  <a:lnTo>
-                    <a:pt x="2291920" y="234870"/>
-                  </a:lnTo>
-                  <a:lnTo>
-                    <a:pt x="2363543" y="241364"/>
-                  </a:lnTo>
-                  <a:lnTo>
-                    <a:pt x="2435165" y="247810"/>
-                  </a:lnTo>
-                  <a:lnTo>
-                    <a:pt x="2506788" y="254210"/>
-                  </a:lnTo>
-                  <a:lnTo>
-                    <a:pt x="2578410" y="260563"/>
-                  </a:lnTo>
-                  <a:lnTo>
-                    <a:pt x="2650033" y="266870"/>
-                  </a:lnTo>
-                  <a:lnTo>
-                    <a:pt x="2721655" y="273132"/>
-                  </a:lnTo>
-                  <a:lnTo>
-                    <a:pt x="2793278" y="279348"/>
-                  </a:lnTo>
-                  <a:lnTo>
-                    <a:pt x="2864901" y="285518"/>
-                  </a:lnTo>
-                  <a:lnTo>
-                    <a:pt x="2936523" y="291644"/>
-                  </a:lnTo>
-                  <a:lnTo>
-                    <a:pt x="3008146" y="297726"/>
-                  </a:lnTo>
-                  <a:lnTo>
-                    <a:pt x="3079768" y="303763"/>
-                  </a:lnTo>
-                  <a:lnTo>
-                    <a:pt x="3151391" y="309756"/>
-                  </a:lnTo>
-                  <a:lnTo>
-                    <a:pt x="3223013" y="315706"/>
-                  </a:lnTo>
-                  <a:lnTo>
-                    <a:pt x="3294636" y="321613"/>
-                  </a:lnTo>
-                  <a:lnTo>
-                    <a:pt x="3366258" y="327477"/>
-                  </a:lnTo>
-                  <a:lnTo>
-                    <a:pt x="3437881" y="333298"/>
-                  </a:lnTo>
-                  <a:lnTo>
-                    <a:pt x="3509503" y="339078"/>
-                  </a:lnTo>
-                  <a:lnTo>
-                    <a:pt x="3581126" y="344815"/>
-                  </a:lnTo>
-                  <a:lnTo>
-                    <a:pt x="3652748" y="350510"/>
-                  </a:lnTo>
-                  <a:lnTo>
-                    <a:pt x="3724371" y="356164"/>
-                  </a:lnTo>
-                  <a:lnTo>
-                    <a:pt x="3795993" y="361777"/>
-                  </a:lnTo>
-                  <a:lnTo>
-                    <a:pt x="3867616" y="367350"/>
-                  </a:lnTo>
-                  <a:lnTo>
-                    <a:pt x="3939238" y="372881"/>
-                  </a:lnTo>
-                  <a:lnTo>
-                    <a:pt x="4010861" y="378373"/>
-                  </a:lnTo>
-                  <a:lnTo>
-                    <a:pt x="4082483" y="383825"/>
-                  </a:lnTo>
-                  <a:lnTo>
-                    <a:pt x="4154106" y="389237"/>
-                  </a:lnTo>
-                  <a:lnTo>
-                    <a:pt x="4225729" y="394610"/>
-                  </a:lnTo>
-                  <a:lnTo>
-                    <a:pt x="4297351" y="399944"/>
-                  </a:lnTo>
-                  <a:lnTo>
-                    <a:pt x="4368974" y="405240"/>
-                  </a:lnTo>
-                  <a:lnTo>
-                    <a:pt x="4440596" y="410496"/>
-                  </a:lnTo>
-                  <a:lnTo>
-                    <a:pt x="4512219" y="415715"/>
-                  </a:lnTo>
-                  <a:lnTo>
-                    <a:pt x="4583841" y="420896"/>
-                  </a:lnTo>
-                  <a:lnTo>
-                    <a:pt x="4655464" y="426039"/>
-                  </a:lnTo>
-                  <a:lnTo>
-                    <a:pt x="4727086" y="431145"/>
-                  </a:lnTo>
-                  <a:lnTo>
-                    <a:pt x="4798709" y="436214"/>
-                  </a:lnTo>
-                  <a:lnTo>
-                    <a:pt x="4870331" y="441245"/>
-                  </a:lnTo>
-                  <a:lnTo>
-                    <a:pt x="4941954" y="446241"/>
-                  </a:lnTo>
-                  <a:lnTo>
-                    <a:pt x="5013576" y="451200"/>
-                  </a:lnTo>
-                  <a:lnTo>
-                    <a:pt x="5085199" y="456123"/>
-                  </a:lnTo>
-                  <a:lnTo>
-                    <a:pt x="5156821" y="461011"/>
-                  </a:lnTo>
-                  <a:lnTo>
-                    <a:pt x="5228444" y="465863"/>
-                  </a:lnTo>
-                  <a:lnTo>
-                    <a:pt x="5300066" y="470679"/>
-                  </a:lnTo>
-                  <a:lnTo>
-                    <a:pt x="5371689" y="475461"/>
-                  </a:lnTo>
-                  <a:lnTo>
-                    <a:pt x="5443311" y="480208"/>
-                  </a:lnTo>
-                  <a:lnTo>
-                    <a:pt x="5514934" y="484921"/>
-                  </a:lnTo>
-                  <a:lnTo>
-                    <a:pt x="5586557" y="489599"/>
-                  </a:lnTo>
-                  <a:lnTo>
-                    <a:pt x="5658179" y="494243"/>
-                  </a:lnTo>
-                  <a:lnTo>
-                    <a:pt x="5729802" y="498854"/>
-                  </a:lnTo>
-                  <a:lnTo>
-                    <a:pt x="5801424" y="503431"/>
-                  </a:lnTo>
-                  <a:lnTo>
-                    <a:pt x="5873047" y="507975"/>
-                  </a:lnTo>
-                  <a:lnTo>
-                    <a:pt x="5944669" y="512486"/>
-                  </a:lnTo>
-                  <a:lnTo>
-                    <a:pt x="6016292" y="516965"/>
-                  </a:lnTo>
-                  <a:lnTo>
-                    <a:pt x="6087914" y="521410"/>
-                  </a:lnTo>
-                  <a:lnTo>
-                    <a:pt x="6159537" y="525824"/>
-                  </a:lnTo>
-                  <a:lnTo>
-                    <a:pt x="6231159" y="530205"/>
-                  </a:lnTo>
-                  <a:lnTo>
-                    <a:pt x="6302782" y="534555"/>
-                  </a:lnTo>
-                  <a:lnTo>
-                    <a:pt x="6374404" y="538873"/>
-                  </a:lnTo>
-                  <a:lnTo>
-                    <a:pt x="6446027" y="543160"/>
-                  </a:lnTo>
-                  <a:lnTo>
-                    <a:pt x="6517649" y="547415"/>
-                  </a:lnTo>
-                  <a:lnTo>
-                    <a:pt x="6589272" y="551640"/>
-                  </a:lnTo>
-                  <a:lnTo>
-                    <a:pt x="6660894" y="555834"/>
-                  </a:lnTo>
-                  <a:lnTo>
-                    <a:pt x="6732517" y="559998"/>
-                  </a:lnTo>
-                  <a:lnTo>
-                    <a:pt x="6804139" y="564131"/>
-                  </a:lnTo>
-                  <a:lnTo>
-                    <a:pt x="6875762" y="568234"/>
-                  </a:lnTo>
-                  <a:lnTo>
-                    <a:pt x="6947385" y="572308"/>
-                  </a:lnTo>
-                  <a:lnTo>
-                    <a:pt x="7019007" y="576352"/>
-                  </a:lnTo>
-                  <a:lnTo>
-                    <a:pt x="7090630" y="580366"/>
+                    <a:pt x="71622" y="7977"/>
+                  </a:lnTo>
+                  <a:lnTo>
+                    <a:pt x="143245" y="15898"/>
+                  </a:lnTo>
+                  <a:lnTo>
+                    <a:pt x="214867" y="23762"/>
+                  </a:lnTo>
+                  <a:lnTo>
+                    <a:pt x="286490" y="31570"/>
+                  </a:lnTo>
+                  <a:lnTo>
+                    <a:pt x="358112" y="39323"/>
+                  </a:lnTo>
+                  <a:lnTo>
+                    <a:pt x="429735" y="47021"/>
+                  </a:lnTo>
+                  <a:lnTo>
+                    <a:pt x="501357" y="54664"/>
+                  </a:lnTo>
+                  <a:lnTo>
+                    <a:pt x="572980" y="62253"/>
+                  </a:lnTo>
+                  <a:lnTo>
+                    <a:pt x="644602" y="69788"/>
+                  </a:lnTo>
+                  <a:lnTo>
+                    <a:pt x="716225" y="77269"/>
+                  </a:lnTo>
+                  <a:lnTo>
+                    <a:pt x="787847" y="84697"/>
+                  </a:lnTo>
+                  <a:lnTo>
+                    <a:pt x="859470" y="92073"/>
+                  </a:lnTo>
+                  <a:lnTo>
+                    <a:pt x="931092" y="99395"/>
+                  </a:lnTo>
+                  <a:lnTo>
+                    <a:pt x="1002715" y="106666"/>
+                  </a:lnTo>
+                  <a:lnTo>
+                    <a:pt x="1074337" y="113885"/>
+                  </a:lnTo>
+                  <a:lnTo>
+                    <a:pt x="1145960" y="121053"/>
+                  </a:lnTo>
+                  <a:lnTo>
+                    <a:pt x="1217582" y="128170"/>
+                  </a:lnTo>
+                  <a:lnTo>
+                    <a:pt x="1289205" y="135236"/>
+                  </a:lnTo>
+                  <a:lnTo>
+                    <a:pt x="1360827" y="142252"/>
+                  </a:lnTo>
+                  <a:lnTo>
+                    <a:pt x="1432450" y="149218"/>
+                  </a:lnTo>
+                  <a:lnTo>
+                    <a:pt x="1504073" y="156135"/>
+                  </a:lnTo>
+                  <a:lnTo>
+                    <a:pt x="1575695" y="163002"/>
+                  </a:lnTo>
+                  <a:lnTo>
+                    <a:pt x="1647318" y="169821"/>
+                  </a:lnTo>
+                  <a:lnTo>
+                    <a:pt x="1718940" y="176591"/>
+                  </a:lnTo>
+                  <a:lnTo>
+                    <a:pt x="1790563" y="183313"/>
+                  </a:lnTo>
+                  <a:lnTo>
+                    <a:pt x="1862185" y="189987"/>
+                  </a:lnTo>
+                  <a:lnTo>
+                    <a:pt x="1933808" y="196614"/>
+                  </a:lnTo>
+                  <a:lnTo>
+                    <a:pt x="2005430" y="203194"/>
+                  </a:lnTo>
+                  <a:lnTo>
+                    <a:pt x="2077053" y="209727"/>
+                  </a:lnTo>
+                  <a:lnTo>
+                    <a:pt x="2148675" y="216213"/>
+                  </a:lnTo>
+                  <a:lnTo>
+                    <a:pt x="2220298" y="222653"/>
+                  </a:lnTo>
+                  <a:lnTo>
+                    <a:pt x="2291920" y="229048"/>
+                  </a:lnTo>
+                  <a:lnTo>
+                    <a:pt x="2363543" y="235397"/>
+                  </a:lnTo>
+                  <a:lnTo>
+                    <a:pt x="2435165" y="241701"/>
+                  </a:lnTo>
+                  <a:lnTo>
+                    <a:pt x="2506788" y="247960"/>
+                  </a:lnTo>
+                  <a:lnTo>
+                    <a:pt x="2578410" y="254175"/>
+                  </a:lnTo>
+                  <a:lnTo>
+                    <a:pt x="2650033" y="260345"/>
+                  </a:lnTo>
+                  <a:lnTo>
+                    <a:pt x="2721655" y="266472"/>
+                  </a:lnTo>
+                  <a:lnTo>
+                    <a:pt x="2793278" y="272555"/>
+                  </a:lnTo>
+                  <a:lnTo>
+                    <a:pt x="2864901" y="278594"/>
+                  </a:lnTo>
+                  <a:lnTo>
+                    <a:pt x="2936523" y="284591"/>
+                  </a:lnTo>
+                  <a:lnTo>
+                    <a:pt x="3008146" y="290546"/>
+                  </a:lnTo>
+                  <a:lnTo>
+                    <a:pt x="3079768" y="296457"/>
+                  </a:lnTo>
+                  <a:lnTo>
+                    <a:pt x="3151391" y="302327"/>
+                  </a:lnTo>
+                  <a:lnTo>
+                    <a:pt x="3223013" y="308155"/>
+                  </a:lnTo>
+                  <a:lnTo>
+                    <a:pt x="3294636" y="313942"/>
+                  </a:lnTo>
+                  <a:lnTo>
+                    <a:pt x="3366258" y="319688"/>
+                  </a:lnTo>
+                  <a:lnTo>
+                    <a:pt x="3437881" y="325392"/>
+                  </a:lnTo>
+                  <a:lnTo>
+                    <a:pt x="3509503" y="331057"/>
+                  </a:lnTo>
+                  <a:lnTo>
+                    <a:pt x="3581126" y="336680"/>
+                  </a:lnTo>
+                  <a:lnTo>
+                    <a:pt x="3652748" y="342264"/>
+                  </a:lnTo>
+                  <a:lnTo>
+                    <a:pt x="3724371" y="347809"/>
+                  </a:lnTo>
+                  <a:lnTo>
+                    <a:pt x="3795993" y="353313"/>
+                  </a:lnTo>
+                  <a:lnTo>
+                    <a:pt x="3867616" y="358779"/>
+                  </a:lnTo>
+                  <a:lnTo>
+                    <a:pt x="3939238" y="364206"/>
+                  </a:lnTo>
+                  <a:lnTo>
+                    <a:pt x="4010861" y="369594"/>
+                  </a:lnTo>
+                  <a:lnTo>
+                    <a:pt x="4082483" y="374944"/>
+                  </a:lnTo>
+                  <a:lnTo>
+                    <a:pt x="4154106" y="380256"/>
+                  </a:lnTo>
+                  <a:lnTo>
+                    <a:pt x="4225729" y="385530"/>
+                  </a:lnTo>
+                  <a:lnTo>
+                    <a:pt x="4297351" y="390767"/>
+                  </a:lnTo>
+                  <a:lnTo>
+                    <a:pt x="4368974" y="395966"/>
+                  </a:lnTo>
+                  <a:lnTo>
+                    <a:pt x="4440596" y="401129"/>
+                  </a:lnTo>
+                  <a:lnTo>
+                    <a:pt x="4512219" y="406254"/>
+                  </a:lnTo>
+                  <a:lnTo>
+                    <a:pt x="4583841" y="411344"/>
+                  </a:lnTo>
+                  <a:lnTo>
+                    <a:pt x="4655464" y="416397"/>
+                  </a:lnTo>
+                  <a:lnTo>
+                    <a:pt x="4727086" y="421414"/>
+                  </a:lnTo>
+                  <a:lnTo>
+                    <a:pt x="4798709" y="426395"/>
+                  </a:lnTo>
+                  <a:lnTo>
+                    <a:pt x="4870331" y="431342"/>
+                  </a:lnTo>
+                  <a:lnTo>
+                    <a:pt x="4941954" y="436252"/>
+                  </a:lnTo>
+                  <a:lnTo>
+                    <a:pt x="5013576" y="441129"/>
+                  </a:lnTo>
+                  <a:lnTo>
+                    <a:pt x="5085199" y="445970"/>
+                  </a:lnTo>
+                  <a:lnTo>
+                    <a:pt x="5156821" y="450777"/>
+                  </a:lnTo>
+                  <a:lnTo>
+                    <a:pt x="5228444" y="455550"/>
+                  </a:lnTo>
+                  <a:lnTo>
+                    <a:pt x="5300066" y="460289"/>
+                  </a:lnTo>
+                  <a:lnTo>
+                    <a:pt x="5371689" y="464994"/>
+                  </a:lnTo>
+                  <a:lnTo>
+                    <a:pt x="5443311" y="469665"/>
+                  </a:lnTo>
+                  <a:lnTo>
+                    <a:pt x="5514934" y="474304"/>
+                  </a:lnTo>
+                  <a:lnTo>
+                    <a:pt x="5586557" y="478909"/>
+                  </a:lnTo>
+                  <a:lnTo>
+                    <a:pt x="5658179" y="483482"/>
+                  </a:lnTo>
+                  <a:lnTo>
+                    <a:pt x="5729802" y="488023"/>
+                  </a:lnTo>
+                  <a:lnTo>
+                    <a:pt x="5801424" y="492531"/>
+                  </a:lnTo>
+                  <a:lnTo>
+                    <a:pt x="5873047" y="497007"/>
+                  </a:lnTo>
+                  <a:lnTo>
+                    <a:pt x="5944669" y="501451"/>
+                  </a:lnTo>
+                  <a:lnTo>
+                    <a:pt x="6016292" y="505863"/>
+                  </a:lnTo>
+                  <a:lnTo>
+                    <a:pt x="6087914" y="510244"/>
+                  </a:lnTo>
+                  <a:lnTo>
+                    <a:pt x="6159537" y="514594"/>
+                  </a:lnTo>
+                  <a:lnTo>
+                    <a:pt x="6231159" y="518914"/>
+                  </a:lnTo>
+                  <a:lnTo>
+                    <a:pt x="6302782" y="523202"/>
+                  </a:lnTo>
+                  <a:lnTo>
+                    <a:pt x="6374404" y="527460"/>
+                  </a:lnTo>
+                  <a:lnTo>
+                    <a:pt x="6446027" y="531687"/>
+                  </a:lnTo>
+                  <a:lnTo>
+                    <a:pt x="6517649" y="535885"/>
+                  </a:lnTo>
+                  <a:lnTo>
+                    <a:pt x="6589272" y="540053"/>
+                  </a:lnTo>
+                  <a:lnTo>
+                    <a:pt x="6660894" y="544191"/>
+                  </a:lnTo>
+                  <a:lnTo>
+                    <a:pt x="6732517" y="548300"/>
+                  </a:lnTo>
+                  <a:lnTo>
+                    <a:pt x="6804139" y="552379"/>
+                  </a:lnTo>
+                  <a:lnTo>
+                    <a:pt x="6875762" y="556430"/>
+                  </a:lnTo>
+                  <a:lnTo>
+                    <a:pt x="6947385" y="560451"/>
+                  </a:lnTo>
+                  <a:lnTo>
+                    <a:pt x="7019007" y="564444"/>
+                  </a:lnTo>
+                  <a:lnTo>
+                    <a:pt x="7090630" y="568409"/>
                   </a:lnTo>
                 </a:path>
               </a:pathLst>
@@ -5945,7 +5945,7 @@
                   <a:latin typeface="Helvetica"/>
                   <a:cs typeface="Helvetica"/>
                 </a:rPr>
-                <a:t>subHR per 10 % decline: 1.09 (1.03-1.16), p_Bonf = 0.012 (n = 6)  |  per IQR decline (Δ = 27.5 %): 1.28 (1.09-1.49)  |  IQR: [-29.1, -1.6] %</a:t>
+                <a:t>subHR per 10 % decline: 1.09 (1.03-1.15), p_Bonf = 0.014 (n = 6)  |  per IQR decline (Δ = 27.5 %): 1.27 (1.09-1.48)  |  IQR: [-29.1, -1.6] %</a:t>
               </a:r>
             </a:p>
           </p:txBody>
